--- a/figures/Figure1_overview.pptx
+++ b/figures/Figure1_overview.pptx
@@ -2,7 +2,7 @@
 <file path=ppt/presentation.xml><?xml version="1.0" encoding="utf-8"?>
 <p:presentation xmlns:a="http://schemas.openxmlformats.org/drawingml/2006/main" xmlns:r="http://schemas.openxmlformats.org/officeDocument/2006/relationships" xmlns:p="http://schemas.openxmlformats.org/presentationml/2006/main" saveSubsetFonts="1" autoCompressPictures="0">
   <p:sldMasterIdLst>
-    <p:sldMasterId id="2147483780" r:id="rId1"/>
+    <p:sldMasterId id="2147483792" r:id="rId1"/>
   </p:sldMasterIdLst>
   <p:notesMasterIdLst>
     <p:notesMasterId r:id="rId3"/>
@@ -10,7 +10,7 @@
   <p:sldIdLst>
     <p:sldId id="256" r:id="rId2"/>
   </p:sldIdLst>
-  <p:sldSz cx="9720263" cy="11879263"/>
+  <p:sldSz cx="6858000" cy="9144000" type="letter"/>
   <p:notesSz cx="6858000" cy="9144000"/>
   <p:defaultTextStyle>
     <a:defPPr>
@@ -197,7 +197,7 @@
           <a:p>
             <a:fld id="{CFD413B5-0B87-F94B-BE91-80666EE91F3B}" type="datetimeFigureOut">
               <a:rPr lang="en-US" smtClean="0"/>
-              <a:t>8/11/26</a:t>
+              <a:t>9/2/26</a:t>
             </a:fld>
             <a:endParaRPr lang="en-US"/>
           </a:p>
@@ -215,8 +215,8 @@
         </p:nvSpPr>
         <p:spPr>
           <a:xfrm>
-            <a:off x="2166938" y="1143000"/>
-            <a:ext cx="2524125" cy="3086100"/>
+            <a:off x="2271713" y="1143000"/>
+            <a:ext cx="2314575" cy="3086100"/>
           </a:xfrm>
           <a:prstGeom prst="rect">
             <a:avLst/>
@@ -370,8 +370,8 @@
   </p:cSld>
   <p:clrMap bg1="lt1" tx1="dk1" bg2="lt2" tx2="dk2" accent1="accent1" accent2="accent2" accent3="accent3" accent4="accent4" accent5="accent5" accent6="accent6" hlink="hlink" folHlink="folHlink"/>
   <p:notesStyle>
-    <a:lvl1pPr marL="0" algn="l" defTabSz="914400" rtl="0" eaLnBrk="1" latinLnBrk="0" hangingPunct="1">
-      <a:defRPr sz="1200" kern="1200">
+    <a:lvl1pPr marL="0" algn="l" defTabSz="677388" rtl="0" eaLnBrk="1" latinLnBrk="0" hangingPunct="1">
+      <a:defRPr sz="889" kern="1200">
         <a:solidFill>
           <a:schemeClr val="tx1"/>
         </a:solidFill>
@@ -380,8 +380,8 @@
         <a:cs typeface="+mn-cs"/>
       </a:defRPr>
     </a:lvl1pPr>
-    <a:lvl2pPr marL="457200" algn="l" defTabSz="914400" rtl="0" eaLnBrk="1" latinLnBrk="0" hangingPunct="1">
-      <a:defRPr sz="1200" kern="1200">
+    <a:lvl2pPr marL="338694" algn="l" defTabSz="677388" rtl="0" eaLnBrk="1" latinLnBrk="0" hangingPunct="1">
+      <a:defRPr sz="889" kern="1200">
         <a:solidFill>
           <a:schemeClr val="tx1"/>
         </a:solidFill>
@@ -390,8 +390,8 @@
         <a:cs typeface="+mn-cs"/>
       </a:defRPr>
     </a:lvl2pPr>
-    <a:lvl3pPr marL="914400" algn="l" defTabSz="914400" rtl="0" eaLnBrk="1" latinLnBrk="0" hangingPunct="1">
-      <a:defRPr sz="1200" kern="1200">
+    <a:lvl3pPr marL="677388" algn="l" defTabSz="677388" rtl="0" eaLnBrk="1" latinLnBrk="0" hangingPunct="1">
+      <a:defRPr sz="889" kern="1200">
         <a:solidFill>
           <a:schemeClr val="tx1"/>
         </a:solidFill>
@@ -400,8 +400,8 @@
         <a:cs typeface="+mn-cs"/>
       </a:defRPr>
     </a:lvl3pPr>
-    <a:lvl4pPr marL="1371600" algn="l" defTabSz="914400" rtl="0" eaLnBrk="1" latinLnBrk="0" hangingPunct="1">
-      <a:defRPr sz="1200" kern="1200">
+    <a:lvl4pPr marL="1016081" algn="l" defTabSz="677388" rtl="0" eaLnBrk="1" latinLnBrk="0" hangingPunct="1">
+      <a:defRPr sz="889" kern="1200">
         <a:solidFill>
           <a:schemeClr val="tx1"/>
         </a:solidFill>
@@ -410,8 +410,8 @@
         <a:cs typeface="+mn-cs"/>
       </a:defRPr>
     </a:lvl4pPr>
-    <a:lvl5pPr marL="1828800" algn="l" defTabSz="914400" rtl="0" eaLnBrk="1" latinLnBrk="0" hangingPunct="1">
-      <a:defRPr sz="1200" kern="1200">
+    <a:lvl5pPr marL="1354775" algn="l" defTabSz="677388" rtl="0" eaLnBrk="1" latinLnBrk="0" hangingPunct="1">
+      <a:defRPr sz="889" kern="1200">
         <a:solidFill>
           <a:schemeClr val="tx1"/>
         </a:solidFill>
@@ -420,8 +420,8 @@
         <a:cs typeface="+mn-cs"/>
       </a:defRPr>
     </a:lvl5pPr>
-    <a:lvl6pPr marL="2286000" algn="l" defTabSz="914400" rtl="0" eaLnBrk="1" latinLnBrk="0" hangingPunct="1">
-      <a:defRPr sz="1200" kern="1200">
+    <a:lvl6pPr marL="1693469" algn="l" defTabSz="677388" rtl="0" eaLnBrk="1" latinLnBrk="0" hangingPunct="1">
+      <a:defRPr sz="889" kern="1200">
         <a:solidFill>
           <a:schemeClr val="tx1"/>
         </a:solidFill>
@@ -430,8 +430,8 @@
         <a:cs typeface="+mn-cs"/>
       </a:defRPr>
     </a:lvl6pPr>
-    <a:lvl7pPr marL="2743200" algn="l" defTabSz="914400" rtl="0" eaLnBrk="1" latinLnBrk="0" hangingPunct="1">
-      <a:defRPr sz="1200" kern="1200">
+    <a:lvl7pPr marL="2032163" algn="l" defTabSz="677388" rtl="0" eaLnBrk="1" latinLnBrk="0" hangingPunct="1">
+      <a:defRPr sz="889" kern="1200">
         <a:solidFill>
           <a:schemeClr val="tx1"/>
         </a:solidFill>
@@ -440,8 +440,8 @@
         <a:cs typeface="+mn-cs"/>
       </a:defRPr>
     </a:lvl7pPr>
-    <a:lvl8pPr marL="3200400" algn="l" defTabSz="914400" rtl="0" eaLnBrk="1" latinLnBrk="0" hangingPunct="1">
-      <a:defRPr sz="1200" kern="1200">
+    <a:lvl8pPr marL="2370856" algn="l" defTabSz="677388" rtl="0" eaLnBrk="1" latinLnBrk="0" hangingPunct="1">
+      <a:defRPr sz="889" kern="1200">
         <a:solidFill>
           <a:schemeClr val="tx1"/>
         </a:solidFill>
@@ -450,8 +450,8 @@
         <a:cs typeface="+mn-cs"/>
       </a:defRPr>
     </a:lvl8pPr>
-    <a:lvl9pPr marL="3657600" algn="l" defTabSz="914400" rtl="0" eaLnBrk="1" latinLnBrk="0" hangingPunct="1">
-      <a:defRPr sz="1200" kern="1200">
+    <a:lvl9pPr marL="2709550" algn="l" defTabSz="677388" rtl="0" eaLnBrk="1" latinLnBrk="0" hangingPunct="1">
+      <a:defRPr sz="889" kern="1200">
         <a:solidFill>
           <a:schemeClr val="tx1"/>
         </a:solidFill>
@@ -493,8 +493,8 @@
         </p:nvSpPr>
         <p:spPr>
           <a:xfrm>
-            <a:off x="2166938" y="1143000"/>
-            <a:ext cx="2524125" cy="3086100"/>
+            <a:off x="2271713" y="1143000"/>
+            <a:ext cx="2314575" cy="3086100"/>
           </a:xfrm>
         </p:spPr>
       </p:sp>
@@ -582,15 +582,15 @@
         </p:nvSpPr>
         <p:spPr>
           <a:xfrm>
-            <a:off x="729020" y="1944130"/>
-            <a:ext cx="8262224" cy="4135743"/>
+            <a:off x="514350" y="1496484"/>
+            <a:ext cx="5829300" cy="3183467"/>
           </a:xfrm>
         </p:spPr>
         <p:txBody>
           <a:bodyPr anchor="b"/>
           <a:lstStyle>
             <a:lvl1pPr algn="ctr">
-              <a:defRPr sz="6378"/>
+              <a:defRPr sz="4500"/>
             </a:lvl1pPr>
           </a:lstStyle>
           <a:p>
@@ -614,8 +614,8 @@
         </p:nvSpPr>
         <p:spPr>
           <a:xfrm>
-            <a:off x="1215033" y="6239364"/>
-            <a:ext cx="7290197" cy="2868071"/>
+            <a:off x="857250" y="4802717"/>
+            <a:ext cx="5143500" cy="2207683"/>
           </a:xfrm>
         </p:spPr>
         <p:txBody>
@@ -623,39 +623,39 @@
           <a:lstStyle>
             <a:lvl1pPr marL="0" indent="0" algn="ctr">
               <a:buNone/>
-              <a:defRPr sz="2551"/>
+              <a:defRPr sz="1800"/>
             </a:lvl1pPr>
-            <a:lvl2pPr marL="486004" indent="0" algn="ctr">
-              <a:buNone/>
-              <a:defRPr sz="2126"/>
+            <a:lvl2pPr marL="342900" indent="0" algn="ctr">
+              <a:buNone/>
+              <a:defRPr sz="1500"/>
             </a:lvl2pPr>
-            <a:lvl3pPr marL="972007" indent="0" algn="ctr">
-              <a:buNone/>
-              <a:defRPr sz="1913"/>
+            <a:lvl3pPr marL="685800" indent="0" algn="ctr">
+              <a:buNone/>
+              <a:defRPr sz="1350"/>
             </a:lvl3pPr>
-            <a:lvl4pPr marL="1458011" indent="0" algn="ctr">
-              <a:buNone/>
-              <a:defRPr sz="1701"/>
+            <a:lvl4pPr marL="1028700" indent="0" algn="ctr">
+              <a:buNone/>
+              <a:defRPr sz="1200"/>
             </a:lvl4pPr>
-            <a:lvl5pPr marL="1944014" indent="0" algn="ctr">
-              <a:buNone/>
-              <a:defRPr sz="1701"/>
+            <a:lvl5pPr marL="1371600" indent="0" algn="ctr">
+              <a:buNone/>
+              <a:defRPr sz="1200"/>
             </a:lvl5pPr>
-            <a:lvl6pPr marL="2430018" indent="0" algn="ctr">
-              <a:buNone/>
-              <a:defRPr sz="1701"/>
+            <a:lvl6pPr marL="1714500" indent="0" algn="ctr">
+              <a:buNone/>
+              <a:defRPr sz="1200"/>
             </a:lvl6pPr>
-            <a:lvl7pPr marL="2916022" indent="0" algn="ctr">
-              <a:buNone/>
-              <a:defRPr sz="1701"/>
+            <a:lvl7pPr marL="2057400" indent="0" algn="ctr">
+              <a:buNone/>
+              <a:defRPr sz="1200"/>
             </a:lvl7pPr>
-            <a:lvl8pPr marL="3402025" indent="0" algn="ctr">
-              <a:buNone/>
-              <a:defRPr sz="1701"/>
+            <a:lvl8pPr marL="2400300" indent="0" algn="ctr">
+              <a:buNone/>
+              <a:defRPr sz="1200"/>
             </a:lvl8pPr>
-            <a:lvl9pPr marL="3888029" indent="0" algn="ctr">
-              <a:buNone/>
-              <a:defRPr sz="1701"/>
+            <a:lvl9pPr marL="2743200" indent="0" algn="ctr">
+              <a:buNone/>
+              <a:defRPr sz="1200"/>
             </a:lvl9pPr>
           </a:lstStyle>
           <a:p>
@@ -684,7 +684,7 @@
           <a:p>
             <a:fld id="{DB4772C7-2EE0-484B-9C95-05369BBBE097}" type="datetimeFigureOut">
               <a:rPr lang="en-US" smtClean="0"/>
-              <a:t>8/11/26</a:t>
+              <a:t>9/2/26</a:t>
             </a:fld>
             <a:endParaRPr lang="en-US"/>
           </a:p>
@@ -735,7 +735,7 @@
     </p:spTree>
     <p:extLst>
       <p:ext uri="{BB962C8B-B14F-4D97-AF65-F5344CB8AC3E}">
-        <p14:creationId xmlns:p14="http://schemas.microsoft.com/office/powerpoint/2010/main" val="2068952447"/>
+        <p14:creationId xmlns:p14="http://schemas.microsoft.com/office/powerpoint/2010/main" val="86913273"/>
       </p:ext>
     </p:extLst>
   </p:cSld>
@@ -854,7 +854,7 @@
           <a:p>
             <a:fld id="{DB4772C7-2EE0-484B-9C95-05369BBBE097}" type="datetimeFigureOut">
               <a:rPr lang="en-US" smtClean="0"/>
-              <a:t>8/11/26</a:t>
+              <a:t>9/2/26</a:t>
             </a:fld>
             <a:endParaRPr lang="en-US"/>
           </a:p>
@@ -905,7 +905,7 @@
     </p:spTree>
     <p:extLst>
       <p:ext uri="{BB962C8B-B14F-4D97-AF65-F5344CB8AC3E}">
-        <p14:creationId xmlns:p14="http://schemas.microsoft.com/office/powerpoint/2010/main" val="3740874164"/>
+        <p14:creationId xmlns:p14="http://schemas.microsoft.com/office/powerpoint/2010/main" val="741643048"/>
       </p:ext>
     </p:extLst>
   </p:cSld>
@@ -944,8 +944,8 @@
         </p:nvSpPr>
         <p:spPr>
           <a:xfrm>
-            <a:off x="6956064" y="632461"/>
-            <a:ext cx="2095932" cy="10067126"/>
+            <a:off x="4907757" y="486833"/>
+            <a:ext cx="1478756" cy="7749117"/>
           </a:xfrm>
         </p:spPr>
         <p:txBody>
@@ -972,8 +972,8 @@
         </p:nvSpPr>
         <p:spPr>
           <a:xfrm>
-            <a:off x="668269" y="632461"/>
-            <a:ext cx="6166292" cy="10067126"/>
+            <a:off x="471488" y="486833"/>
+            <a:ext cx="4350544" cy="7749117"/>
           </a:xfrm>
         </p:spPr>
         <p:txBody>
@@ -1034,7 +1034,7 @@
           <a:p>
             <a:fld id="{DB4772C7-2EE0-484B-9C95-05369BBBE097}" type="datetimeFigureOut">
               <a:rPr lang="en-US" smtClean="0"/>
-              <a:t>8/11/26</a:t>
+              <a:t>9/2/26</a:t>
             </a:fld>
             <a:endParaRPr lang="en-US"/>
           </a:p>
@@ -1085,7 +1085,7 @@
     </p:spTree>
     <p:extLst>
       <p:ext uri="{BB962C8B-B14F-4D97-AF65-F5344CB8AC3E}">
-        <p14:creationId xmlns:p14="http://schemas.microsoft.com/office/powerpoint/2010/main" val="751377768"/>
+        <p14:creationId xmlns:p14="http://schemas.microsoft.com/office/powerpoint/2010/main" val="3866528440"/>
       </p:ext>
     </p:extLst>
   </p:cSld>
@@ -1204,7 +1204,7 @@
           <a:p>
             <a:fld id="{DB4772C7-2EE0-484B-9C95-05369BBBE097}" type="datetimeFigureOut">
               <a:rPr lang="en-US" smtClean="0"/>
-              <a:t>8/11/26</a:t>
+              <a:t>9/2/26</a:t>
             </a:fld>
             <a:endParaRPr lang="en-US"/>
           </a:p>
@@ -1255,7 +1255,7 @@
     </p:spTree>
     <p:extLst>
       <p:ext uri="{BB962C8B-B14F-4D97-AF65-F5344CB8AC3E}">
-        <p14:creationId xmlns:p14="http://schemas.microsoft.com/office/powerpoint/2010/main" val="539907200"/>
+        <p14:creationId xmlns:p14="http://schemas.microsoft.com/office/powerpoint/2010/main" val="2833224921"/>
       </p:ext>
     </p:extLst>
   </p:cSld>
@@ -1294,15 +1294,15 @@
         </p:nvSpPr>
         <p:spPr>
           <a:xfrm>
-            <a:off x="663206" y="2961570"/>
-            <a:ext cx="8383727" cy="4941443"/>
+            <a:off x="467916" y="2279653"/>
+            <a:ext cx="5915025" cy="3803649"/>
           </a:xfrm>
         </p:spPr>
         <p:txBody>
           <a:bodyPr anchor="b"/>
           <a:lstStyle>
             <a:lvl1pPr>
-              <a:defRPr sz="6378"/>
+              <a:defRPr sz="4500"/>
             </a:lvl1pPr>
           </a:lstStyle>
           <a:p>
@@ -1326,8 +1326,8 @@
         </p:nvSpPr>
         <p:spPr>
           <a:xfrm>
-            <a:off x="663206" y="7949760"/>
-            <a:ext cx="8383727" cy="2598588"/>
+            <a:off x="467916" y="6119286"/>
+            <a:ext cx="5915025" cy="2000249"/>
           </a:xfrm>
         </p:spPr>
         <p:txBody>
@@ -1335,7 +1335,7 @@
           <a:lstStyle>
             <a:lvl1pPr marL="0" indent="0">
               <a:buNone/>
-              <a:defRPr sz="2551">
+              <a:defRPr sz="1800">
                 <a:solidFill>
                   <a:schemeClr val="tx1">
                     <a:tint val="82000"/>
@@ -1343,9 +1343,9 @@
                 </a:solidFill>
               </a:defRPr>
             </a:lvl1pPr>
-            <a:lvl2pPr marL="486004" indent="0">
-              <a:buNone/>
-              <a:defRPr sz="2126">
+            <a:lvl2pPr marL="342900" indent="0">
+              <a:buNone/>
+              <a:defRPr sz="1500">
                 <a:solidFill>
                   <a:schemeClr val="tx1">
                     <a:tint val="82000"/>
@@ -1353,9 +1353,9 @@
                 </a:solidFill>
               </a:defRPr>
             </a:lvl2pPr>
-            <a:lvl3pPr marL="972007" indent="0">
-              <a:buNone/>
-              <a:defRPr sz="1913">
+            <a:lvl3pPr marL="685800" indent="0">
+              <a:buNone/>
+              <a:defRPr sz="1350">
                 <a:solidFill>
                   <a:schemeClr val="tx1">
                     <a:tint val="82000"/>
@@ -1363,9 +1363,9 @@
                 </a:solidFill>
               </a:defRPr>
             </a:lvl3pPr>
-            <a:lvl4pPr marL="1458011" indent="0">
-              <a:buNone/>
-              <a:defRPr sz="1701">
+            <a:lvl4pPr marL="1028700" indent="0">
+              <a:buNone/>
+              <a:defRPr sz="1200">
                 <a:solidFill>
                   <a:schemeClr val="tx1">
                     <a:tint val="82000"/>
@@ -1373,9 +1373,9 @@
                 </a:solidFill>
               </a:defRPr>
             </a:lvl4pPr>
-            <a:lvl5pPr marL="1944014" indent="0">
-              <a:buNone/>
-              <a:defRPr sz="1701">
+            <a:lvl5pPr marL="1371600" indent="0">
+              <a:buNone/>
+              <a:defRPr sz="1200">
                 <a:solidFill>
                   <a:schemeClr val="tx1">
                     <a:tint val="82000"/>
@@ -1383,9 +1383,9 @@
                 </a:solidFill>
               </a:defRPr>
             </a:lvl5pPr>
-            <a:lvl6pPr marL="2430018" indent="0">
-              <a:buNone/>
-              <a:defRPr sz="1701">
+            <a:lvl6pPr marL="1714500" indent="0">
+              <a:buNone/>
+              <a:defRPr sz="1200">
                 <a:solidFill>
                   <a:schemeClr val="tx1">
                     <a:tint val="82000"/>
@@ -1393,9 +1393,9 @@
                 </a:solidFill>
               </a:defRPr>
             </a:lvl6pPr>
-            <a:lvl7pPr marL="2916022" indent="0">
-              <a:buNone/>
-              <a:defRPr sz="1701">
+            <a:lvl7pPr marL="2057400" indent="0">
+              <a:buNone/>
+              <a:defRPr sz="1200">
                 <a:solidFill>
                   <a:schemeClr val="tx1">
                     <a:tint val="82000"/>
@@ -1403,9 +1403,9 @@
                 </a:solidFill>
               </a:defRPr>
             </a:lvl7pPr>
-            <a:lvl8pPr marL="3402025" indent="0">
-              <a:buNone/>
-              <a:defRPr sz="1701">
+            <a:lvl8pPr marL="2400300" indent="0">
+              <a:buNone/>
+              <a:defRPr sz="1200">
                 <a:solidFill>
                   <a:schemeClr val="tx1">
                     <a:tint val="82000"/>
@@ -1413,9 +1413,9 @@
                 </a:solidFill>
               </a:defRPr>
             </a:lvl8pPr>
-            <a:lvl9pPr marL="3888029" indent="0">
-              <a:buNone/>
-              <a:defRPr sz="1701">
+            <a:lvl9pPr marL="2743200" indent="0">
+              <a:buNone/>
+              <a:defRPr sz="1200">
                 <a:solidFill>
                   <a:schemeClr val="tx1">
                     <a:tint val="82000"/>
@@ -1450,7 +1450,7 @@
           <a:p>
             <a:fld id="{DB4772C7-2EE0-484B-9C95-05369BBBE097}" type="datetimeFigureOut">
               <a:rPr lang="en-US" smtClean="0"/>
-              <a:t>8/11/26</a:t>
+              <a:t>9/2/26</a:t>
             </a:fld>
             <a:endParaRPr lang="en-US"/>
           </a:p>
@@ -1501,7 +1501,7 @@
     </p:spTree>
     <p:extLst>
       <p:ext uri="{BB962C8B-B14F-4D97-AF65-F5344CB8AC3E}">
-        <p14:creationId xmlns:p14="http://schemas.microsoft.com/office/powerpoint/2010/main" val="2595405544"/>
+        <p14:creationId xmlns:p14="http://schemas.microsoft.com/office/powerpoint/2010/main" val="1469020673"/>
       </p:ext>
     </p:extLst>
   </p:cSld>
@@ -1563,8 +1563,8 @@
         </p:nvSpPr>
         <p:spPr>
           <a:xfrm>
-            <a:off x="668268" y="3162304"/>
-            <a:ext cx="4131112" cy="7537283"/>
+            <a:off x="471488" y="2434167"/>
+            <a:ext cx="2914650" cy="5801784"/>
           </a:xfrm>
         </p:spPr>
         <p:txBody>
@@ -1620,8 +1620,8 @@
         </p:nvSpPr>
         <p:spPr>
           <a:xfrm>
-            <a:off x="4920883" y="3162304"/>
-            <a:ext cx="4131112" cy="7537283"/>
+            <a:off x="3471863" y="2434167"/>
+            <a:ext cx="2914650" cy="5801784"/>
           </a:xfrm>
         </p:spPr>
         <p:txBody>
@@ -1682,7 +1682,7 @@
           <a:p>
             <a:fld id="{DB4772C7-2EE0-484B-9C95-05369BBBE097}" type="datetimeFigureOut">
               <a:rPr lang="en-US" smtClean="0"/>
-              <a:t>8/11/26</a:t>
+              <a:t>9/2/26</a:t>
             </a:fld>
             <a:endParaRPr lang="en-US"/>
           </a:p>
@@ -1733,7 +1733,7 @@
     </p:spTree>
     <p:extLst>
       <p:ext uri="{BB962C8B-B14F-4D97-AF65-F5344CB8AC3E}">
-        <p14:creationId xmlns:p14="http://schemas.microsoft.com/office/powerpoint/2010/main" val="2940589656"/>
+        <p14:creationId xmlns:p14="http://schemas.microsoft.com/office/powerpoint/2010/main" val="2925928480"/>
       </p:ext>
     </p:extLst>
   </p:cSld>
@@ -1772,8 +1772,8 @@
         </p:nvSpPr>
         <p:spPr>
           <a:xfrm>
-            <a:off x="669534" y="632464"/>
-            <a:ext cx="8383727" cy="2296108"/>
+            <a:off x="472381" y="486835"/>
+            <a:ext cx="5915025" cy="1767417"/>
           </a:xfrm>
         </p:spPr>
         <p:txBody>
@@ -1800,8 +1800,8 @@
         </p:nvSpPr>
         <p:spPr>
           <a:xfrm>
-            <a:off x="669535" y="2912070"/>
-            <a:ext cx="4112126" cy="1427161"/>
+            <a:off x="472381" y="2241551"/>
+            <a:ext cx="2901255" cy="1098549"/>
           </a:xfrm>
         </p:spPr>
         <p:txBody>
@@ -1809,39 +1809,39 @@
           <a:lstStyle>
             <a:lvl1pPr marL="0" indent="0">
               <a:buNone/>
-              <a:defRPr sz="2551" b="1"/>
+              <a:defRPr sz="1800" b="1"/>
             </a:lvl1pPr>
-            <a:lvl2pPr marL="486004" indent="0">
-              <a:buNone/>
-              <a:defRPr sz="2126" b="1"/>
+            <a:lvl2pPr marL="342900" indent="0">
+              <a:buNone/>
+              <a:defRPr sz="1500" b="1"/>
             </a:lvl2pPr>
-            <a:lvl3pPr marL="972007" indent="0">
-              <a:buNone/>
-              <a:defRPr sz="1913" b="1"/>
+            <a:lvl3pPr marL="685800" indent="0">
+              <a:buNone/>
+              <a:defRPr sz="1350" b="1"/>
             </a:lvl3pPr>
-            <a:lvl4pPr marL="1458011" indent="0">
-              <a:buNone/>
-              <a:defRPr sz="1701" b="1"/>
+            <a:lvl4pPr marL="1028700" indent="0">
+              <a:buNone/>
+              <a:defRPr sz="1200" b="1"/>
             </a:lvl4pPr>
-            <a:lvl5pPr marL="1944014" indent="0">
-              <a:buNone/>
-              <a:defRPr sz="1701" b="1"/>
+            <a:lvl5pPr marL="1371600" indent="0">
+              <a:buNone/>
+              <a:defRPr sz="1200" b="1"/>
             </a:lvl5pPr>
-            <a:lvl6pPr marL="2430018" indent="0">
-              <a:buNone/>
-              <a:defRPr sz="1701" b="1"/>
+            <a:lvl6pPr marL="1714500" indent="0">
+              <a:buNone/>
+              <a:defRPr sz="1200" b="1"/>
             </a:lvl6pPr>
-            <a:lvl7pPr marL="2916022" indent="0">
-              <a:buNone/>
-              <a:defRPr sz="1701" b="1"/>
+            <a:lvl7pPr marL="2057400" indent="0">
+              <a:buNone/>
+              <a:defRPr sz="1200" b="1"/>
             </a:lvl7pPr>
-            <a:lvl8pPr marL="3402025" indent="0">
-              <a:buNone/>
-              <a:defRPr sz="1701" b="1"/>
+            <a:lvl8pPr marL="2400300" indent="0">
+              <a:buNone/>
+              <a:defRPr sz="1200" b="1"/>
             </a:lvl8pPr>
-            <a:lvl9pPr marL="3888029" indent="0">
-              <a:buNone/>
-              <a:defRPr sz="1701" b="1"/>
+            <a:lvl9pPr marL="2743200" indent="0">
+              <a:buNone/>
+              <a:defRPr sz="1200" b="1"/>
             </a:lvl9pPr>
           </a:lstStyle>
           <a:p>
@@ -1865,8 +1865,8 @@
         </p:nvSpPr>
         <p:spPr>
           <a:xfrm>
-            <a:off x="669535" y="4339231"/>
-            <a:ext cx="4112126" cy="6382355"/>
+            <a:off x="472381" y="3340100"/>
+            <a:ext cx="2901255" cy="4912784"/>
           </a:xfrm>
         </p:spPr>
         <p:txBody>
@@ -1922,8 +1922,8 @@
         </p:nvSpPr>
         <p:spPr>
           <a:xfrm>
-            <a:off x="4920884" y="2912070"/>
-            <a:ext cx="4132378" cy="1427161"/>
+            <a:off x="3471863" y="2241551"/>
+            <a:ext cx="2915543" cy="1098549"/>
           </a:xfrm>
         </p:spPr>
         <p:txBody>
@@ -1931,39 +1931,39 @@
           <a:lstStyle>
             <a:lvl1pPr marL="0" indent="0">
               <a:buNone/>
-              <a:defRPr sz="2551" b="1"/>
+              <a:defRPr sz="1800" b="1"/>
             </a:lvl1pPr>
-            <a:lvl2pPr marL="486004" indent="0">
-              <a:buNone/>
-              <a:defRPr sz="2126" b="1"/>
+            <a:lvl2pPr marL="342900" indent="0">
+              <a:buNone/>
+              <a:defRPr sz="1500" b="1"/>
             </a:lvl2pPr>
-            <a:lvl3pPr marL="972007" indent="0">
-              <a:buNone/>
-              <a:defRPr sz="1913" b="1"/>
+            <a:lvl3pPr marL="685800" indent="0">
+              <a:buNone/>
+              <a:defRPr sz="1350" b="1"/>
             </a:lvl3pPr>
-            <a:lvl4pPr marL="1458011" indent="0">
-              <a:buNone/>
-              <a:defRPr sz="1701" b="1"/>
+            <a:lvl4pPr marL="1028700" indent="0">
+              <a:buNone/>
+              <a:defRPr sz="1200" b="1"/>
             </a:lvl4pPr>
-            <a:lvl5pPr marL="1944014" indent="0">
-              <a:buNone/>
-              <a:defRPr sz="1701" b="1"/>
+            <a:lvl5pPr marL="1371600" indent="0">
+              <a:buNone/>
+              <a:defRPr sz="1200" b="1"/>
             </a:lvl5pPr>
-            <a:lvl6pPr marL="2430018" indent="0">
-              <a:buNone/>
-              <a:defRPr sz="1701" b="1"/>
+            <a:lvl6pPr marL="1714500" indent="0">
+              <a:buNone/>
+              <a:defRPr sz="1200" b="1"/>
             </a:lvl6pPr>
-            <a:lvl7pPr marL="2916022" indent="0">
-              <a:buNone/>
-              <a:defRPr sz="1701" b="1"/>
+            <a:lvl7pPr marL="2057400" indent="0">
+              <a:buNone/>
+              <a:defRPr sz="1200" b="1"/>
             </a:lvl7pPr>
-            <a:lvl8pPr marL="3402025" indent="0">
-              <a:buNone/>
-              <a:defRPr sz="1701" b="1"/>
+            <a:lvl8pPr marL="2400300" indent="0">
+              <a:buNone/>
+              <a:defRPr sz="1200" b="1"/>
             </a:lvl8pPr>
-            <a:lvl9pPr marL="3888029" indent="0">
-              <a:buNone/>
-              <a:defRPr sz="1701" b="1"/>
+            <a:lvl9pPr marL="2743200" indent="0">
+              <a:buNone/>
+              <a:defRPr sz="1200" b="1"/>
             </a:lvl9pPr>
           </a:lstStyle>
           <a:p>
@@ -1987,8 +1987,8 @@
         </p:nvSpPr>
         <p:spPr>
           <a:xfrm>
-            <a:off x="4920884" y="4339231"/>
-            <a:ext cx="4132378" cy="6382355"/>
+            <a:off x="3471863" y="3340100"/>
+            <a:ext cx="2915543" cy="4912784"/>
           </a:xfrm>
         </p:spPr>
         <p:txBody>
@@ -2049,7 +2049,7 @@
           <a:p>
             <a:fld id="{DB4772C7-2EE0-484B-9C95-05369BBBE097}" type="datetimeFigureOut">
               <a:rPr lang="en-US" smtClean="0"/>
-              <a:t>8/11/26</a:t>
+              <a:t>9/2/26</a:t>
             </a:fld>
             <a:endParaRPr lang="en-US"/>
           </a:p>
@@ -2100,7 +2100,7 @@
     </p:spTree>
     <p:extLst>
       <p:ext uri="{BB962C8B-B14F-4D97-AF65-F5344CB8AC3E}">
-        <p14:creationId xmlns:p14="http://schemas.microsoft.com/office/powerpoint/2010/main" val="761971817"/>
+        <p14:creationId xmlns:p14="http://schemas.microsoft.com/office/powerpoint/2010/main" val="2723440542"/>
       </p:ext>
     </p:extLst>
   </p:cSld>
@@ -2167,7 +2167,7 @@
           <a:p>
             <a:fld id="{DB4772C7-2EE0-484B-9C95-05369BBBE097}" type="datetimeFigureOut">
               <a:rPr lang="en-US" smtClean="0"/>
-              <a:t>8/11/26</a:t>
+              <a:t>9/2/26</a:t>
             </a:fld>
             <a:endParaRPr lang="en-US"/>
           </a:p>
@@ -2218,7 +2218,7 @@
     </p:spTree>
     <p:extLst>
       <p:ext uri="{BB962C8B-B14F-4D97-AF65-F5344CB8AC3E}">
-        <p14:creationId xmlns:p14="http://schemas.microsoft.com/office/powerpoint/2010/main" val="2707965109"/>
+        <p14:creationId xmlns:p14="http://schemas.microsoft.com/office/powerpoint/2010/main" val="1429016344"/>
       </p:ext>
     </p:extLst>
   </p:cSld>
@@ -2262,7 +2262,7 @@
           <a:p>
             <a:fld id="{DB4772C7-2EE0-484B-9C95-05369BBBE097}" type="datetimeFigureOut">
               <a:rPr lang="en-US" smtClean="0"/>
-              <a:t>8/11/26</a:t>
+              <a:t>9/2/26</a:t>
             </a:fld>
             <a:endParaRPr lang="en-US"/>
           </a:p>
@@ -2313,7 +2313,7 @@
     </p:spTree>
     <p:extLst>
       <p:ext uri="{BB962C8B-B14F-4D97-AF65-F5344CB8AC3E}">
-        <p14:creationId xmlns:p14="http://schemas.microsoft.com/office/powerpoint/2010/main" val="3064296303"/>
+        <p14:creationId xmlns:p14="http://schemas.microsoft.com/office/powerpoint/2010/main" val="1765521736"/>
       </p:ext>
     </p:extLst>
   </p:cSld>
@@ -2352,15 +2352,15 @@
         </p:nvSpPr>
         <p:spPr>
           <a:xfrm>
-            <a:off x="669534" y="791951"/>
-            <a:ext cx="3135038" cy="2771828"/>
+            <a:off x="472381" y="609600"/>
+            <a:ext cx="2211884" cy="2133600"/>
           </a:xfrm>
         </p:spPr>
         <p:txBody>
           <a:bodyPr anchor="b"/>
           <a:lstStyle>
             <a:lvl1pPr>
-              <a:defRPr sz="3402"/>
+              <a:defRPr sz="2400"/>
             </a:lvl1pPr>
           </a:lstStyle>
           <a:p>
@@ -2384,39 +2384,39 @@
         </p:nvSpPr>
         <p:spPr>
           <a:xfrm>
-            <a:off x="4132378" y="1710397"/>
-            <a:ext cx="4920883" cy="8441976"/>
+            <a:off x="2915543" y="1316568"/>
+            <a:ext cx="3471863" cy="6498167"/>
           </a:xfrm>
         </p:spPr>
         <p:txBody>
           <a:bodyPr/>
           <a:lstStyle>
             <a:lvl1pPr>
-              <a:defRPr sz="3402"/>
+              <a:defRPr sz="2400"/>
             </a:lvl1pPr>
             <a:lvl2pPr>
-              <a:defRPr sz="2976"/>
+              <a:defRPr sz="2100"/>
             </a:lvl2pPr>
             <a:lvl3pPr>
-              <a:defRPr sz="2551"/>
+              <a:defRPr sz="1800"/>
             </a:lvl3pPr>
             <a:lvl4pPr>
-              <a:defRPr sz="2126"/>
+              <a:defRPr sz="1500"/>
             </a:lvl4pPr>
             <a:lvl5pPr>
-              <a:defRPr sz="2126"/>
+              <a:defRPr sz="1500"/>
             </a:lvl5pPr>
             <a:lvl6pPr>
-              <a:defRPr sz="2126"/>
+              <a:defRPr sz="1500"/>
             </a:lvl6pPr>
             <a:lvl7pPr>
-              <a:defRPr sz="2126"/>
+              <a:defRPr sz="1500"/>
             </a:lvl7pPr>
             <a:lvl8pPr>
-              <a:defRPr sz="2126"/>
+              <a:defRPr sz="1500"/>
             </a:lvl8pPr>
             <a:lvl9pPr>
-              <a:defRPr sz="2126"/>
+              <a:defRPr sz="1500"/>
             </a:lvl9pPr>
           </a:lstStyle>
           <a:p>
@@ -2469,8 +2469,8 @@
         </p:nvSpPr>
         <p:spPr>
           <a:xfrm>
-            <a:off x="669534" y="3563779"/>
-            <a:ext cx="3135038" cy="6602341"/>
+            <a:off x="472381" y="2743200"/>
+            <a:ext cx="2211884" cy="5082117"/>
           </a:xfrm>
         </p:spPr>
         <p:txBody>
@@ -2478,39 +2478,39 @@
           <a:lstStyle>
             <a:lvl1pPr marL="0" indent="0">
               <a:buNone/>
-              <a:defRPr sz="1701"/>
+              <a:defRPr sz="1200"/>
             </a:lvl1pPr>
-            <a:lvl2pPr marL="486004" indent="0">
-              <a:buNone/>
-              <a:defRPr sz="1488"/>
+            <a:lvl2pPr marL="342900" indent="0">
+              <a:buNone/>
+              <a:defRPr sz="1050"/>
             </a:lvl2pPr>
-            <a:lvl3pPr marL="972007" indent="0">
-              <a:buNone/>
-              <a:defRPr sz="1276"/>
+            <a:lvl3pPr marL="685800" indent="0">
+              <a:buNone/>
+              <a:defRPr sz="900"/>
             </a:lvl3pPr>
-            <a:lvl4pPr marL="1458011" indent="0">
-              <a:buNone/>
-              <a:defRPr sz="1063"/>
+            <a:lvl4pPr marL="1028700" indent="0">
+              <a:buNone/>
+              <a:defRPr sz="750"/>
             </a:lvl4pPr>
-            <a:lvl5pPr marL="1944014" indent="0">
-              <a:buNone/>
-              <a:defRPr sz="1063"/>
+            <a:lvl5pPr marL="1371600" indent="0">
+              <a:buNone/>
+              <a:defRPr sz="750"/>
             </a:lvl5pPr>
-            <a:lvl6pPr marL="2430018" indent="0">
-              <a:buNone/>
-              <a:defRPr sz="1063"/>
+            <a:lvl6pPr marL="1714500" indent="0">
+              <a:buNone/>
+              <a:defRPr sz="750"/>
             </a:lvl6pPr>
-            <a:lvl7pPr marL="2916022" indent="0">
-              <a:buNone/>
-              <a:defRPr sz="1063"/>
+            <a:lvl7pPr marL="2057400" indent="0">
+              <a:buNone/>
+              <a:defRPr sz="750"/>
             </a:lvl7pPr>
-            <a:lvl8pPr marL="3402025" indent="0">
-              <a:buNone/>
-              <a:defRPr sz="1063"/>
+            <a:lvl8pPr marL="2400300" indent="0">
+              <a:buNone/>
+              <a:defRPr sz="750"/>
             </a:lvl8pPr>
-            <a:lvl9pPr marL="3888029" indent="0">
-              <a:buNone/>
-              <a:defRPr sz="1063"/>
+            <a:lvl9pPr marL="2743200" indent="0">
+              <a:buNone/>
+              <a:defRPr sz="750"/>
             </a:lvl9pPr>
           </a:lstStyle>
           <a:p>
@@ -2539,7 +2539,7 @@
           <a:p>
             <a:fld id="{DB4772C7-2EE0-484B-9C95-05369BBBE097}" type="datetimeFigureOut">
               <a:rPr lang="en-US" smtClean="0"/>
-              <a:t>8/11/26</a:t>
+              <a:t>9/2/26</a:t>
             </a:fld>
             <a:endParaRPr lang="en-US"/>
           </a:p>
@@ -2590,7 +2590,7 @@
     </p:spTree>
     <p:extLst>
       <p:ext uri="{BB962C8B-B14F-4D97-AF65-F5344CB8AC3E}">
-        <p14:creationId xmlns:p14="http://schemas.microsoft.com/office/powerpoint/2010/main" val="2054587332"/>
+        <p14:creationId xmlns:p14="http://schemas.microsoft.com/office/powerpoint/2010/main" val="1596955453"/>
       </p:ext>
     </p:extLst>
   </p:cSld>
@@ -2629,15 +2629,15 @@
         </p:nvSpPr>
         <p:spPr>
           <a:xfrm>
-            <a:off x="669534" y="791951"/>
-            <a:ext cx="3135038" cy="2771828"/>
+            <a:off x="472381" y="609600"/>
+            <a:ext cx="2211884" cy="2133600"/>
           </a:xfrm>
         </p:spPr>
         <p:txBody>
           <a:bodyPr anchor="b"/>
           <a:lstStyle>
             <a:lvl1pPr>
-              <a:defRPr sz="3402"/>
+              <a:defRPr sz="2400"/>
             </a:lvl1pPr>
           </a:lstStyle>
           <a:p>
@@ -2661,8 +2661,8 @@
         </p:nvSpPr>
         <p:spPr>
           <a:xfrm>
-            <a:off x="4132378" y="1710397"/>
-            <a:ext cx="4920883" cy="8441976"/>
+            <a:off x="2915543" y="1316568"/>
+            <a:ext cx="3471863" cy="6498167"/>
           </a:xfrm>
         </p:spPr>
         <p:txBody>
@@ -2670,39 +2670,39 @@
           <a:lstStyle>
             <a:lvl1pPr marL="0" indent="0">
               <a:buNone/>
-              <a:defRPr sz="3402"/>
+              <a:defRPr sz="2400"/>
             </a:lvl1pPr>
-            <a:lvl2pPr marL="486004" indent="0">
-              <a:buNone/>
-              <a:defRPr sz="2976"/>
+            <a:lvl2pPr marL="342900" indent="0">
+              <a:buNone/>
+              <a:defRPr sz="2100"/>
             </a:lvl2pPr>
-            <a:lvl3pPr marL="972007" indent="0">
-              <a:buNone/>
-              <a:defRPr sz="2551"/>
+            <a:lvl3pPr marL="685800" indent="0">
+              <a:buNone/>
+              <a:defRPr sz="1800"/>
             </a:lvl3pPr>
-            <a:lvl4pPr marL="1458011" indent="0">
-              <a:buNone/>
-              <a:defRPr sz="2126"/>
+            <a:lvl4pPr marL="1028700" indent="0">
+              <a:buNone/>
+              <a:defRPr sz="1500"/>
             </a:lvl4pPr>
-            <a:lvl5pPr marL="1944014" indent="0">
-              <a:buNone/>
-              <a:defRPr sz="2126"/>
+            <a:lvl5pPr marL="1371600" indent="0">
+              <a:buNone/>
+              <a:defRPr sz="1500"/>
             </a:lvl5pPr>
-            <a:lvl6pPr marL="2430018" indent="0">
-              <a:buNone/>
-              <a:defRPr sz="2126"/>
+            <a:lvl6pPr marL="1714500" indent="0">
+              <a:buNone/>
+              <a:defRPr sz="1500"/>
             </a:lvl6pPr>
-            <a:lvl7pPr marL="2916022" indent="0">
-              <a:buNone/>
-              <a:defRPr sz="2126"/>
+            <a:lvl7pPr marL="2057400" indent="0">
+              <a:buNone/>
+              <a:defRPr sz="1500"/>
             </a:lvl7pPr>
-            <a:lvl8pPr marL="3402025" indent="0">
-              <a:buNone/>
-              <a:defRPr sz="2126"/>
+            <a:lvl8pPr marL="2400300" indent="0">
+              <a:buNone/>
+              <a:defRPr sz="1500"/>
             </a:lvl8pPr>
-            <a:lvl9pPr marL="3888029" indent="0">
-              <a:buNone/>
-              <a:defRPr sz="2126"/>
+            <a:lvl9pPr marL="2743200" indent="0">
+              <a:buNone/>
+              <a:defRPr sz="1500"/>
             </a:lvl9pPr>
           </a:lstStyle>
           <a:p>
@@ -2726,8 +2726,8 @@
         </p:nvSpPr>
         <p:spPr>
           <a:xfrm>
-            <a:off x="669534" y="3563779"/>
-            <a:ext cx="3135038" cy="6602341"/>
+            <a:off x="472381" y="2743200"/>
+            <a:ext cx="2211884" cy="5082117"/>
           </a:xfrm>
         </p:spPr>
         <p:txBody>
@@ -2735,39 +2735,39 @@
           <a:lstStyle>
             <a:lvl1pPr marL="0" indent="0">
               <a:buNone/>
-              <a:defRPr sz="1701"/>
+              <a:defRPr sz="1200"/>
             </a:lvl1pPr>
-            <a:lvl2pPr marL="486004" indent="0">
-              <a:buNone/>
-              <a:defRPr sz="1488"/>
+            <a:lvl2pPr marL="342900" indent="0">
+              <a:buNone/>
+              <a:defRPr sz="1050"/>
             </a:lvl2pPr>
-            <a:lvl3pPr marL="972007" indent="0">
-              <a:buNone/>
-              <a:defRPr sz="1276"/>
+            <a:lvl3pPr marL="685800" indent="0">
+              <a:buNone/>
+              <a:defRPr sz="900"/>
             </a:lvl3pPr>
-            <a:lvl4pPr marL="1458011" indent="0">
-              <a:buNone/>
-              <a:defRPr sz="1063"/>
+            <a:lvl4pPr marL="1028700" indent="0">
+              <a:buNone/>
+              <a:defRPr sz="750"/>
             </a:lvl4pPr>
-            <a:lvl5pPr marL="1944014" indent="0">
-              <a:buNone/>
-              <a:defRPr sz="1063"/>
+            <a:lvl5pPr marL="1371600" indent="0">
+              <a:buNone/>
+              <a:defRPr sz="750"/>
             </a:lvl5pPr>
-            <a:lvl6pPr marL="2430018" indent="0">
-              <a:buNone/>
-              <a:defRPr sz="1063"/>
+            <a:lvl6pPr marL="1714500" indent="0">
+              <a:buNone/>
+              <a:defRPr sz="750"/>
             </a:lvl6pPr>
-            <a:lvl7pPr marL="2916022" indent="0">
-              <a:buNone/>
-              <a:defRPr sz="1063"/>
+            <a:lvl7pPr marL="2057400" indent="0">
+              <a:buNone/>
+              <a:defRPr sz="750"/>
             </a:lvl7pPr>
-            <a:lvl8pPr marL="3402025" indent="0">
-              <a:buNone/>
-              <a:defRPr sz="1063"/>
+            <a:lvl8pPr marL="2400300" indent="0">
+              <a:buNone/>
+              <a:defRPr sz="750"/>
             </a:lvl8pPr>
-            <a:lvl9pPr marL="3888029" indent="0">
-              <a:buNone/>
-              <a:defRPr sz="1063"/>
+            <a:lvl9pPr marL="2743200" indent="0">
+              <a:buNone/>
+              <a:defRPr sz="750"/>
             </a:lvl9pPr>
           </a:lstStyle>
           <a:p>
@@ -2796,7 +2796,7 @@
           <a:p>
             <a:fld id="{DB4772C7-2EE0-484B-9C95-05369BBBE097}" type="datetimeFigureOut">
               <a:rPr lang="en-US" smtClean="0"/>
-              <a:t>8/11/26</a:t>
+              <a:t>9/2/26</a:t>
             </a:fld>
             <a:endParaRPr lang="en-US"/>
           </a:p>
@@ -2847,7 +2847,7 @@
     </p:spTree>
     <p:extLst>
       <p:ext uri="{BB962C8B-B14F-4D97-AF65-F5344CB8AC3E}">
-        <p14:creationId xmlns:p14="http://schemas.microsoft.com/office/powerpoint/2010/main" val="1275247989"/>
+        <p14:creationId xmlns:p14="http://schemas.microsoft.com/office/powerpoint/2010/main" val="734689358"/>
       </p:ext>
     </p:extLst>
   </p:cSld>
@@ -2891,8 +2891,8 @@
         </p:nvSpPr>
         <p:spPr>
           <a:xfrm>
-            <a:off x="668268" y="632464"/>
-            <a:ext cx="8383727" cy="2296108"/>
+            <a:off x="471488" y="486835"/>
+            <a:ext cx="5915025" cy="1767417"/>
           </a:xfrm>
           <a:prstGeom prst="rect">
             <a:avLst/>
@@ -2924,8 +2924,8 @@
         </p:nvSpPr>
         <p:spPr>
           <a:xfrm>
-            <a:off x="668268" y="3162304"/>
-            <a:ext cx="8383727" cy="7537283"/>
+            <a:off x="471488" y="2434167"/>
+            <a:ext cx="5915025" cy="5801784"/>
           </a:xfrm>
           <a:prstGeom prst="rect">
             <a:avLst/>
@@ -2986,8 +2986,8 @@
         </p:nvSpPr>
         <p:spPr>
           <a:xfrm>
-            <a:off x="668268" y="11010319"/>
-            <a:ext cx="2187059" cy="632461"/>
+            <a:off x="471487" y="8475136"/>
+            <a:ext cx="1543050" cy="486833"/>
           </a:xfrm>
           <a:prstGeom prst="rect">
             <a:avLst/>
@@ -2997,7 +2997,7 @@
           <a:bodyPr vert="horz" lIns="91440" tIns="45720" rIns="91440" bIns="45720" rtlCol="0" anchor="ctr"/>
           <a:lstStyle>
             <a:lvl1pPr algn="l">
-              <a:defRPr sz="1276">
+              <a:defRPr sz="900">
                 <a:solidFill>
                   <a:schemeClr val="tx1">
                     <a:tint val="82000"/>
@@ -3009,7 +3009,7 @@
           <a:p>
             <a:fld id="{DB4772C7-2EE0-484B-9C95-05369BBBE097}" type="datetimeFigureOut">
               <a:rPr lang="en-US" smtClean="0"/>
-              <a:t>8/11/26</a:t>
+              <a:t>9/2/26</a:t>
             </a:fld>
             <a:endParaRPr lang="en-US"/>
           </a:p>
@@ -3027,8 +3027,8 @@
         </p:nvSpPr>
         <p:spPr>
           <a:xfrm>
-            <a:off x="3219837" y="11010319"/>
-            <a:ext cx="3280589" cy="632461"/>
+            <a:off x="2271713" y="8475136"/>
+            <a:ext cx="2314575" cy="486833"/>
           </a:xfrm>
           <a:prstGeom prst="rect">
             <a:avLst/>
@@ -3038,7 +3038,7 @@
           <a:bodyPr vert="horz" lIns="91440" tIns="45720" rIns="91440" bIns="45720" rtlCol="0" anchor="ctr"/>
           <a:lstStyle>
             <a:lvl1pPr algn="ctr">
-              <a:defRPr sz="1276">
+              <a:defRPr sz="900">
                 <a:solidFill>
                   <a:schemeClr val="tx1">
                     <a:tint val="82000"/>
@@ -3064,8 +3064,8 @@
         </p:nvSpPr>
         <p:spPr>
           <a:xfrm>
-            <a:off x="6864936" y="11010319"/>
-            <a:ext cx="2187059" cy="632461"/>
+            <a:off x="4843463" y="8475136"/>
+            <a:ext cx="1543050" cy="486833"/>
           </a:xfrm>
           <a:prstGeom prst="rect">
             <a:avLst/>
@@ -3075,7 +3075,7 @@
           <a:bodyPr vert="horz" lIns="91440" tIns="45720" rIns="91440" bIns="45720" rtlCol="0" anchor="ctr"/>
           <a:lstStyle>
             <a:lvl1pPr algn="r">
-              <a:defRPr sz="1276">
+              <a:defRPr sz="900">
                 <a:solidFill>
                   <a:schemeClr val="tx1">
                     <a:tint val="82000"/>
@@ -3096,27 +3096,27 @@
     </p:spTree>
     <p:extLst>
       <p:ext uri="{BB962C8B-B14F-4D97-AF65-F5344CB8AC3E}">
-        <p14:creationId xmlns:p14="http://schemas.microsoft.com/office/powerpoint/2010/main" val="3690717204"/>
+        <p14:creationId xmlns:p14="http://schemas.microsoft.com/office/powerpoint/2010/main" val="799037201"/>
       </p:ext>
     </p:extLst>
   </p:cSld>
   <p:clrMap bg1="lt1" tx1="dk1" bg2="lt2" tx2="dk2" accent1="accent1" accent2="accent2" accent3="accent3" accent4="accent4" accent5="accent5" accent6="accent6" hlink="hlink" folHlink="folHlink"/>
   <p:sldLayoutIdLst>
-    <p:sldLayoutId id="2147483781" r:id="rId1"/>
-    <p:sldLayoutId id="2147483782" r:id="rId2"/>
-    <p:sldLayoutId id="2147483783" r:id="rId3"/>
-    <p:sldLayoutId id="2147483784" r:id="rId4"/>
-    <p:sldLayoutId id="2147483785" r:id="rId5"/>
-    <p:sldLayoutId id="2147483786" r:id="rId6"/>
-    <p:sldLayoutId id="2147483787" r:id="rId7"/>
-    <p:sldLayoutId id="2147483788" r:id="rId8"/>
-    <p:sldLayoutId id="2147483789" r:id="rId9"/>
-    <p:sldLayoutId id="2147483790" r:id="rId10"/>
-    <p:sldLayoutId id="2147483791" r:id="rId11"/>
+    <p:sldLayoutId id="2147483793" r:id="rId1"/>
+    <p:sldLayoutId id="2147483794" r:id="rId2"/>
+    <p:sldLayoutId id="2147483795" r:id="rId3"/>
+    <p:sldLayoutId id="2147483796" r:id="rId4"/>
+    <p:sldLayoutId id="2147483797" r:id="rId5"/>
+    <p:sldLayoutId id="2147483798" r:id="rId6"/>
+    <p:sldLayoutId id="2147483799" r:id="rId7"/>
+    <p:sldLayoutId id="2147483800" r:id="rId8"/>
+    <p:sldLayoutId id="2147483801" r:id="rId9"/>
+    <p:sldLayoutId id="2147483802" r:id="rId10"/>
+    <p:sldLayoutId id="2147483803" r:id="rId11"/>
   </p:sldLayoutIdLst>
   <p:txStyles>
     <p:titleStyle>
-      <a:lvl1pPr algn="l" defTabSz="972007" rtl="0" eaLnBrk="1" latinLnBrk="0" hangingPunct="1">
+      <a:lvl1pPr algn="l" defTabSz="685800" rtl="0" eaLnBrk="1" latinLnBrk="0" hangingPunct="1">
         <a:lnSpc>
           <a:spcPct val="90000"/>
         </a:lnSpc>
@@ -3124,7 +3124,7 @@
           <a:spcPct val="0"/>
         </a:spcBef>
         <a:buNone/>
-        <a:defRPr sz="4677" kern="1200">
+        <a:defRPr sz="3300" kern="1200">
           <a:solidFill>
             <a:schemeClr val="tx1"/>
           </a:solidFill>
@@ -3135,16 +3135,16 @@
       </a:lvl1pPr>
     </p:titleStyle>
     <p:bodyStyle>
-      <a:lvl1pPr marL="243002" indent="-243002" algn="l" defTabSz="972007" rtl="0" eaLnBrk="1" latinLnBrk="0" hangingPunct="1">
+      <a:lvl1pPr marL="171450" indent="-171450" algn="l" defTabSz="685800" rtl="0" eaLnBrk="1" latinLnBrk="0" hangingPunct="1">
         <a:lnSpc>
           <a:spcPct val="90000"/>
         </a:lnSpc>
         <a:spcBef>
-          <a:spcPts val="1063"/>
+          <a:spcPts val="750"/>
         </a:spcBef>
         <a:buFont typeface="Arial" panose="020B0604020202020204" pitchFamily="34" charset="0"/>
         <a:buChar char="•"/>
-        <a:defRPr sz="2976" kern="1200">
+        <a:defRPr sz="2100" kern="1200">
           <a:solidFill>
             <a:schemeClr val="tx1"/>
           </a:solidFill>
@@ -3153,16 +3153,16 @@
           <a:cs typeface="+mn-cs"/>
         </a:defRPr>
       </a:lvl1pPr>
-      <a:lvl2pPr marL="729005" indent="-243002" algn="l" defTabSz="972007" rtl="0" eaLnBrk="1" latinLnBrk="0" hangingPunct="1">
+      <a:lvl2pPr marL="514350" indent="-171450" algn="l" defTabSz="685800" rtl="0" eaLnBrk="1" latinLnBrk="0" hangingPunct="1">
         <a:lnSpc>
           <a:spcPct val="90000"/>
         </a:lnSpc>
         <a:spcBef>
-          <a:spcPts val="532"/>
+          <a:spcPts val="375"/>
         </a:spcBef>
         <a:buFont typeface="Arial" panose="020B0604020202020204" pitchFamily="34" charset="0"/>
         <a:buChar char="•"/>
-        <a:defRPr sz="2551" kern="1200">
+        <a:defRPr sz="1800" kern="1200">
           <a:solidFill>
             <a:schemeClr val="tx1"/>
           </a:solidFill>
@@ -3171,16 +3171,16 @@
           <a:cs typeface="+mn-cs"/>
         </a:defRPr>
       </a:lvl2pPr>
-      <a:lvl3pPr marL="1215009" indent="-243002" algn="l" defTabSz="972007" rtl="0" eaLnBrk="1" latinLnBrk="0" hangingPunct="1">
+      <a:lvl3pPr marL="857250" indent="-171450" algn="l" defTabSz="685800" rtl="0" eaLnBrk="1" latinLnBrk="0" hangingPunct="1">
         <a:lnSpc>
           <a:spcPct val="90000"/>
         </a:lnSpc>
         <a:spcBef>
-          <a:spcPts val="532"/>
+          <a:spcPts val="375"/>
         </a:spcBef>
         <a:buFont typeface="Arial" panose="020B0604020202020204" pitchFamily="34" charset="0"/>
         <a:buChar char="•"/>
-        <a:defRPr sz="2126" kern="1200">
+        <a:defRPr sz="1500" kern="1200">
           <a:solidFill>
             <a:schemeClr val="tx1"/>
           </a:solidFill>
@@ -3189,16 +3189,16 @@
           <a:cs typeface="+mn-cs"/>
         </a:defRPr>
       </a:lvl3pPr>
-      <a:lvl4pPr marL="1701013" indent="-243002" algn="l" defTabSz="972007" rtl="0" eaLnBrk="1" latinLnBrk="0" hangingPunct="1">
+      <a:lvl4pPr marL="1200150" indent="-171450" algn="l" defTabSz="685800" rtl="0" eaLnBrk="1" latinLnBrk="0" hangingPunct="1">
         <a:lnSpc>
           <a:spcPct val="90000"/>
         </a:lnSpc>
         <a:spcBef>
-          <a:spcPts val="532"/>
+          <a:spcPts val="375"/>
         </a:spcBef>
         <a:buFont typeface="Arial" panose="020B0604020202020204" pitchFamily="34" charset="0"/>
         <a:buChar char="•"/>
-        <a:defRPr sz="1913" kern="1200">
+        <a:defRPr sz="1350" kern="1200">
           <a:solidFill>
             <a:schemeClr val="tx1"/>
           </a:solidFill>
@@ -3207,16 +3207,16 @@
           <a:cs typeface="+mn-cs"/>
         </a:defRPr>
       </a:lvl4pPr>
-      <a:lvl5pPr marL="2187016" indent="-243002" algn="l" defTabSz="972007" rtl="0" eaLnBrk="1" latinLnBrk="0" hangingPunct="1">
+      <a:lvl5pPr marL="1543050" indent="-171450" algn="l" defTabSz="685800" rtl="0" eaLnBrk="1" latinLnBrk="0" hangingPunct="1">
         <a:lnSpc>
           <a:spcPct val="90000"/>
         </a:lnSpc>
         <a:spcBef>
-          <a:spcPts val="532"/>
+          <a:spcPts val="375"/>
         </a:spcBef>
         <a:buFont typeface="Arial" panose="020B0604020202020204" pitchFamily="34" charset="0"/>
         <a:buChar char="•"/>
-        <a:defRPr sz="1913" kern="1200">
+        <a:defRPr sz="1350" kern="1200">
           <a:solidFill>
             <a:schemeClr val="tx1"/>
           </a:solidFill>
@@ -3225,16 +3225,16 @@
           <a:cs typeface="+mn-cs"/>
         </a:defRPr>
       </a:lvl5pPr>
-      <a:lvl6pPr marL="2673020" indent="-243002" algn="l" defTabSz="972007" rtl="0" eaLnBrk="1" latinLnBrk="0" hangingPunct="1">
+      <a:lvl6pPr marL="1885950" indent="-171450" algn="l" defTabSz="685800" rtl="0" eaLnBrk="1" latinLnBrk="0" hangingPunct="1">
         <a:lnSpc>
           <a:spcPct val="90000"/>
         </a:lnSpc>
         <a:spcBef>
-          <a:spcPts val="532"/>
+          <a:spcPts val="375"/>
         </a:spcBef>
         <a:buFont typeface="Arial" panose="020B0604020202020204" pitchFamily="34" charset="0"/>
         <a:buChar char="•"/>
-        <a:defRPr sz="1913" kern="1200">
+        <a:defRPr sz="1350" kern="1200">
           <a:solidFill>
             <a:schemeClr val="tx1"/>
           </a:solidFill>
@@ -3243,16 +3243,16 @@
           <a:cs typeface="+mn-cs"/>
         </a:defRPr>
       </a:lvl6pPr>
-      <a:lvl7pPr marL="3159023" indent="-243002" algn="l" defTabSz="972007" rtl="0" eaLnBrk="1" latinLnBrk="0" hangingPunct="1">
+      <a:lvl7pPr marL="2228850" indent="-171450" algn="l" defTabSz="685800" rtl="0" eaLnBrk="1" latinLnBrk="0" hangingPunct="1">
         <a:lnSpc>
           <a:spcPct val="90000"/>
         </a:lnSpc>
         <a:spcBef>
-          <a:spcPts val="532"/>
+          <a:spcPts val="375"/>
         </a:spcBef>
         <a:buFont typeface="Arial" panose="020B0604020202020204" pitchFamily="34" charset="0"/>
         <a:buChar char="•"/>
-        <a:defRPr sz="1913" kern="1200">
+        <a:defRPr sz="1350" kern="1200">
           <a:solidFill>
             <a:schemeClr val="tx1"/>
           </a:solidFill>
@@ -3261,16 +3261,16 @@
           <a:cs typeface="+mn-cs"/>
         </a:defRPr>
       </a:lvl7pPr>
-      <a:lvl8pPr marL="3645027" indent="-243002" algn="l" defTabSz="972007" rtl="0" eaLnBrk="1" latinLnBrk="0" hangingPunct="1">
+      <a:lvl8pPr marL="2571750" indent="-171450" algn="l" defTabSz="685800" rtl="0" eaLnBrk="1" latinLnBrk="0" hangingPunct="1">
         <a:lnSpc>
           <a:spcPct val="90000"/>
         </a:lnSpc>
         <a:spcBef>
-          <a:spcPts val="532"/>
+          <a:spcPts val="375"/>
         </a:spcBef>
         <a:buFont typeface="Arial" panose="020B0604020202020204" pitchFamily="34" charset="0"/>
         <a:buChar char="•"/>
-        <a:defRPr sz="1913" kern="1200">
+        <a:defRPr sz="1350" kern="1200">
           <a:solidFill>
             <a:schemeClr val="tx1"/>
           </a:solidFill>
@@ -3279,16 +3279,16 @@
           <a:cs typeface="+mn-cs"/>
         </a:defRPr>
       </a:lvl8pPr>
-      <a:lvl9pPr marL="4131031" indent="-243002" algn="l" defTabSz="972007" rtl="0" eaLnBrk="1" latinLnBrk="0" hangingPunct="1">
+      <a:lvl9pPr marL="2914650" indent="-171450" algn="l" defTabSz="685800" rtl="0" eaLnBrk="1" latinLnBrk="0" hangingPunct="1">
         <a:lnSpc>
           <a:spcPct val="90000"/>
         </a:lnSpc>
         <a:spcBef>
-          <a:spcPts val="532"/>
+          <a:spcPts val="375"/>
         </a:spcBef>
         <a:buFont typeface="Arial" panose="020B0604020202020204" pitchFamily="34" charset="0"/>
         <a:buChar char="•"/>
-        <a:defRPr sz="1913" kern="1200">
+        <a:defRPr sz="1350" kern="1200">
           <a:solidFill>
             <a:schemeClr val="tx1"/>
           </a:solidFill>
@@ -3302,8 +3302,8 @@
       <a:defPPr>
         <a:defRPr lang="en-US"/>
       </a:defPPr>
-      <a:lvl1pPr marL="0" algn="l" defTabSz="972007" rtl="0" eaLnBrk="1" latinLnBrk="0" hangingPunct="1">
-        <a:defRPr sz="1913" kern="1200">
+      <a:lvl1pPr marL="0" algn="l" defTabSz="685800" rtl="0" eaLnBrk="1" latinLnBrk="0" hangingPunct="1">
+        <a:defRPr sz="1350" kern="1200">
           <a:solidFill>
             <a:schemeClr val="tx1"/>
           </a:solidFill>
@@ -3312,8 +3312,8 @@
           <a:cs typeface="+mn-cs"/>
         </a:defRPr>
       </a:lvl1pPr>
-      <a:lvl2pPr marL="486004" algn="l" defTabSz="972007" rtl="0" eaLnBrk="1" latinLnBrk="0" hangingPunct="1">
-        <a:defRPr sz="1913" kern="1200">
+      <a:lvl2pPr marL="342900" algn="l" defTabSz="685800" rtl="0" eaLnBrk="1" latinLnBrk="0" hangingPunct="1">
+        <a:defRPr sz="1350" kern="1200">
           <a:solidFill>
             <a:schemeClr val="tx1"/>
           </a:solidFill>
@@ -3322,8 +3322,8 @@
           <a:cs typeface="+mn-cs"/>
         </a:defRPr>
       </a:lvl2pPr>
-      <a:lvl3pPr marL="972007" algn="l" defTabSz="972007" rtl="0" eaLnBrk="1" latinLnBrk="0" hangingPunct="1">
-        <a:defRPr sz="1913" kern="1200">
+      <a:lvl3pPr marL="685800" algn="l" defTabSz="685800" rtl="0" eaLnBrk="1" latinLnBrk="0" hangingPunct="1">
+        <a:defRPr sz="1350" kern="1200">
           <a:solidFill>
             <a:schemeClr val="tx1"/>
           </a:solidFill>
@@ -3332,8 +3332,8 @@
           <a:cs typeface="+mn-cs"/>
         </a:defRPr>
       </a:lvl3pPr>
-      <a:lvl4pPr marL="1458011" algn="l" defTabSz="972007" rtl="0" eaLnBrk="1" latinLnBrk="0" hangingPunct="1">
-        <a:defRPr sz="1913" kern="1200">
+      <a:lvl4pPr marL="1028700" algn="l" defTabSz="685800" rtl="0" eaLnBrk="1" latinLnBrk="0" hangingPunct="1">
+        <a:defRPr sz="1350" kern="1200">
           <a:solidFill>
             <a:schemeClr val="tx1"/>
           </a:solidFill>
@@ -3342,8 +3342,8 @@
           <a:cs typeface="+mn-cs"/>
         </a:defRPr>
       </a:lvl4pPr>
-      <a:lvl5pPr marL="1944014" algn="l" defTabSz="972007" rtl="0" eaLnBrk="1" latinLnBrk="0" hangingPunct="1">
-        <a:defRPr sz="1913" kern="1200">
+      <a:lvl5pPr marL="1371600" algn="l" defTabSz="685800" rtl="0" eaLnBrk="1" latinLnBrk="0" hangingPunct="1">
+        <a:defRPr sz="1350" kern="1200">
           <a:solidFill>
             <a:schemeClr val="tx1"/>
           </a:solidFill>
@@ -3352,8 +3352,8 @@
           <a:cs typeface="+mn-cs"/>
         </a:defRPr>
       </a:lvl5pPr>
-      <a:lvl6pPr marL="2430018" algn="l" defTabSz="972007" rtl="0" eaLnBrk="1" latinLnBrk="0" hangingPunct="1">
-        <a:defRPr sz="1913" kern="1200">
+      <a:lvl6pPr marL="1714500" algn="l" defTabSz="685800" rtl="0" eaLnBrk="1" latinLnBrk="0" hangingPunct="1">
+        <a:defRPr sz="1350" kern="1200">
           <a:solidFill>
             <a:schemeClr val="tx1"/>
           </a:solidFill>
@@ -3362,8 +3362,8 @@
           <a:cs typeface="+mn-cs"/>
         </a:defRPr>
       </a:lvl6pPr>
-      <a:lvl7pPr marL="2916022" algn="l" defTabSz="972007" rtl="0" eaLnBrk="1" latinLnBrk="0" hangingPunct="1">
-        <a:defRPr sz="1913" kern="1200">
+      <a:lvl7pPr marL="2057400" algn="l" defTabSz="685800" rtl="0" eaLnBrk="1" latinLnBrk="0" hangingPunct="1">
+        <a:defRPr sz="1350" kern="1200">
           <a:solidFill>
             <a:schemeClr val="tx1"/>
           </a:solidFill>
@@ -3372,8 +3372,8 @@
           <a:cs typeface="+mn-cs"/>
         </a:defRPr>
       </a:lvl7pPr>
-      <a:lvl8pPr marL="3402025" algn="l" defTabSz="972007" rtl="0" eaLnBrk="1" latinLnBrk="0" hangingPunct="1">
-        <a:defRPr sz="1913" kern="1200">
+      <a:lvl8pPr marL="2400300" algn="l" defTabSz="685800" rtl="0" eaLnBrk="1" latinLnBrk="0" hangingPunct="1">
+        <a:defRPr sz="1350" kern="1200">
           <a:solidFill>
             <a:schemeClr val="tx1"/>
           </a:solidFill>
@@ -3382,8 +3382,8 @@
           <a:cs typeface="+mn-cs"/>
         </a:defRPr>
       </a:lvl8pPr>
-      <a:lvl9pPr marL="3888029" algn="l" defTabSz="972007" rtl="0" eaLnBrk="1" latinLnBrk="0" hangingPunct="1">
-        <a:defRPr sz="1913" kern="1200">
+      <a:lvl9pPr marL="2743200" algn="l" defTabSz="685800" rtl="0" eaLnBrk="1" latinLnBrk="0" hangingPunct="1">
+        <a:defRPr sz="1350" kern="1200">
           <a:solidFill>
             <a:schemeClr val="tx1"/>
           </a:solidFill>
@@ -3416,10 +3416,10 @@
       </p:grpSpPr>
       <p:pic>
         <p:nvPicPr>
-          <p:cNvPr id="30" name="Picture 29">
+          <p:cNvPr id="57" name="Picture 56">
             <a:extLst>
               <a:ext uri="{FF2B5EF4-FFF2-40B4-BE49-F238E27FC236}">
-                <a16:creationId xmlns:a16="http://schemas.microsoft.com/office/drawing/2014/main" id="{FE352DD5-A3C6-4DF3-5143-DD2F14BF21B5}"/>
+                <a16:creationId xmlns:a16="http://schemas.microsoft.com/office/drawing/2014/main" id="{5DDEB47D-23CC-AA6A-1642-9B491377E042}"/>
               </a:ext>
             </a:extLst>
           </p:cNvPr>
@@ -3436,8 +3436,8 @@
         </p:blipFill>
         <p:spPr>
           <a:xfrm>
-            <a:off x="5730912" y="8879543"/>
-            <a:ext cx="2673384" cy="2730671"/>
+            <a:off x="14243" y="109078"/>
+            <a:ext cx="4402364" cy="1836505"/>
           </a:xfrm>
           <a:prstGeom prst="rect">
             <a:avLst/>
@@ -3446,10 +3446,10 @@
       </p:pic>
       <p:pic>
         <p:nvPicPr>
-          <p:cNvPr id="18" name="Picture 17">
+          <p:cNvPr id="45" name="Picture 44">
             <a:extLst>
               <a:ext uri="{FF2B5EF4-FFF2-40B4-BE49-F238E27FC236}">
-                <a16:creationId xmlns:a16="http://schemas.microsoft.com/office/drawing/2014/main" id="{9B8BA847-B83B-A831-FD51-ED9CF4A0AA15}"/>
+                <a16:creationId xmlns:a16="http://schemas.microsoft.com/office/drawing/2014/main" id="{0795C96A-A96C-2F9E-3A65-B354C0CCDBD3}"/>
               </a:ext>
             </a:extLst>
           </p:cNvPr>
@@ -3460,15 +3460,15 @@
         </p:nvPicPr>
         <p:blipFill>
           <a:blip r:embed="rId4"/>
-          <a:srcRect t="37313" b="2881"/>
+          <a:srcRect t="2733" r="2241" b="45635"/>
           <a:stretch>
             <a:fillRect/>
           </a:stretch>
         </p:blipFill>
         <p:spPr>
           <a:xfrm>
-            <a:off x="0" y="2285759"/>
-            <a:ext cx="9724336" cy="4046924"/>
+            <a:off x="147968" y="2067305"/>
+            <a:ext cx="6710032" cy="2466066"/>
           </a:xfrm>
           <a:prstGeom prst="rect">
             <a:avLst/>
@@ -3477,41 +3477,10 @@
       </p:pic>
       <p:pic>
         <p:nvPicPr>
-          <p:cNvPr id="19" name="Picture 18">
+          <p:cNvPr id="54" name="Picture 53">
             <a:extLst>
               <a:ext uri="{FF2B5EF4-FFF2-40B4-BE49-F238E27FC236}">
-                <a16:creationId xmlns:a16="http://schemas.microsoft.com/office/drawing/2014/main" id="{7E8AF7D1-E7A1-2474-7527-8E378FC5156A}"/>
-              </a:ext>
-            </a:extLst>
-          </p:cNvPr>
-          <p:cNvPicPr>
-            <a:picLocks noChangeAspect="1"/>
-          </p:cNvPicPr>
-          <p:nvPr/>
-        </p:nvPicPr>
-        <p:blipFill>
-          <a:blip r:embed="rId4"/>
-          <a:srcRect b="66294"/>
-          <a:stretch>
-            <a:fillRect/>
-          </a:stretch>
-        </p:blipFill>
-        <p:spPr>
-          <a:xfrm>
-            <a:off x="-1" y="13798"/>
-            <a:ext cx="9742337" cy="2285038"/>
-          </a:xfrm>
-          <a:prstGeom prst="rect">
-            <a:avLst/>
-          </a:prstGeom>
-        </p:spPr>
-      </p:pic>
-      <p:pic>
-        <p:nvPicPr>
-          <p:cNvPr id="20" name="Picture 19">
-            <a:extLst>
-              <a:ext uri="{FF2B5EF4-FFF2-40B4-BE49-F238E27FC236}">
-                <a16:creationId xmlns:a16="http://schemas.microsoft.com/office/drawing/2014/main" id="{60C2716D-EB3E-D91C-DA34-F9679C36005A}"/>
+                <a16:creationId xmlns:a16="http://schemas.microsoft.com/office/drawing/2014/main" id="{0E6BC976-01DC-B902-E3EC-8002E21A8588}"/>
               </a:ext>
             </a:extLst>
           </p:cNvPr>
@@ -3522,26 +3491,97 @@
         </p:nvPicPr>
         <p:blipFill>
           <a:blip r:embed="rId5"/>
+          <a:srcRect t="12507" b="-233"/>
           <a:stretch>
             <a:fillRect/>
           </a:stretch>
         </p:blipFill>
         <p:spPr>
           <a:xfrm>
-            <a:off x="114636" y="6535637"/>
-            <a:ext cx="9513061" cy="2285038"/>
+            <a:off x="168805" y="6413987"/>
+            <a:ext cx="2713542" cy="2430210"/>
           </a:xfrm>
           <a:prstGeom prst="rect">
             <a:avLst/>
           </a:prstGeom>
         </p:spPr>
       </p:pic>
+      <p:sp>
+        <p:nvSpPr>
+          <p:cNvPr id="21" name="TextBox 20">
+            <a:extLst>
+              <a:ext uri="{FF2B5EF4-FFF2-40B4-BE49-F238E27FC236}">
+                <a16:creationId xmlns:a16="http://schemas.microsoft.com/office/drawing/2014/main" id="{09485F66-022C-2CC8-3988-1B005D4EEB2A}"/>
+              </a:ext>
+            </a:extLst>
+          </p:cNvPr>
+          <p:cNvSpPr txBox="1"/>
+          <p:nvPr/>
+        </p:nvSpPr>
+        <p:spPr>
+          <a:xfrm>
+            <a:off x="-748" y="8509"/>
+            <a:ext cx="518984" cy="276999"/>
+          </a:xfrm>
+          <a:prstGeom prst="rect">
+            <a:avLst/>
+          </a:prstGeom>
+          <a:noFill/>
+        </p:spPr>
+        <p:txBody>
+          <a:bodyPr wrap="square" rtlCol="0">
+            <a:spAutoFit/>
+          </a:bodyPr>
+          <a:lstStyle/>
+          <a:p>
+            <a:r>
+              <a:rPr lang="en-US" sz="1200" b="1" dirty="0"/>
+              <a:t>a</a:t>
+            </a:r>
+          </a:p>
+        </p:txBody>
+      </p:sp>
+      <p:sp>
+        <p:nvSpPr>
+          <p:cNvPr id="22" name="TextBox 21">
+            <a:extLst>
+              <a:ext uri="{FF2B5EF4-FFF2-40B4-BE49-F238E27FC236}">
+                <a16:creationId xmlns:a16="http://schemas.microsoft.com/office/drawing/2014/main" id="{552E5B0B-3B32-37F8-AFAB-E9396D68EFE4}"/>
+              </a:ext>
+            </a:extLst>
+          </p:cNvPr>
+          <p:cNvSpPr txBox="1"/>
+          <p:nvPr/>
+        </p:nvSpPr>
+        <p:spPr>
+          <a:xfrm>
+            <a:off x="-748" y="2101296"/>
+            <a:ext cx="518984" cy="276999"/>
+          </a:xfrm>
+          <a:prstGeom prst="rect">
+            <a:avLst/>
+          </a:prstGeom>
+          <a:noFill/>
+        </p:spPr>
+        <p:txBody>
+          <a:bodyPr wrap="square" rtlCol="0">
+            <a:spAutoFit/>
+          </a:bodyPr>
+          <a:lstStyle/>
+          <a:p>
+            <a:r>
+              <a:rPr lang="en-US" sz="1200" b="1" dirty="0"/>
+              <a:t>c</a:t>
+            </a:r>
+          </a:p>
+        </p:txBody>
+      </p:sp>
       <p:pic>
         <p:nvPicPr>
-          <p:cNvPr id="21" name="Picture 20">
+          <p:cNvPr id="16" name="Picture 15">
             <a:extLst>
               <a:ext uri="{FF2B5EF4-FFF2-40B4-BE49-F238E27FC236}">
-                <a16:creationId xmlns:a16="http://schemas.microsoft.com/office/drawing/2014/main" id="{05521D28-31FB-781C-9E15-44BB67FF143F}"/>
+                <a16:creationId xmlns:a16="http://schemas.microsoft.com/office/drawing/2014/main" id="{50DAF72F-76AB-C86D-211F-18E9AEF08F31}"/>
               </a:ext>
             </a:extLst>
           </p:cNvPr>
@@ -3552,15 +3592,14 @@
         </p:nvPicPr>
         <p:blipFill>
           <a:blip r:embed="rId6"/>
-          <a:srcRect t="13408"/>
           <a:stretch>
             <a:fillRect/>
           </a:stretch>
         </p:blipFill>
         <p:spPr>
           <a:xfrm>
-            <a:off x="518236" y="9002395"/>
-            <a:ext cx="3184453" cy="2815047"/>
+            <a:off x="59685" y="4685688"/>
+            <a:ext cx="6813305" cy="1636557"/>
           </a:xfrm>
           <a:prstGeom prst="rect">
             <a:avLst/>
@@ -3569,10 +3608,10 @@
       </p:pic>
       <p:sp>
         <p:nvSpPr>
-          <p:cNvPr id="22" name="TextBox 21">
+          <p:cNvPr id="18" name="TextBox 17">
             <a:extLst>
               <a:ext uri="{FF2B5EF4-FFF2-40B4-BE49-F238E27FC236}">
-                <a16:creationId xmlns:a16="http://schemas.microsoft.com/office/drawing/2014/main" id="{10E104E6-3326-7B70-02CE-B9DEE903A93D}"/>
+                <a16:creationId xmlns:a16="http://schemas.microsoft.com/office/drawing/2014/main" id="{62633BCC-DACB-FDD9-B056-F60C3F421A11}"/>
               </a:ext>
             </a:extLst>
           </p:cNvPr>
@@ -3581,8 +3620,8 @@
         </p:nvSpPr>
         <p:spPr>
           <a:xfrm>
-            <a:off x="0" y="6476769"/>
-            <a:ext cx="518984" cy="307777"/>
+            <a:off x="-748" y="4526015"/>
+            <a:ext cx="518984" cy="304699"/>
           </a:xfrm>
           <a:prstGeom prst="rect">
             <a:avLst/>
@@ -3596,158 +3635,18 @@
           <a:lstStyle/>
           <a:p>
             <a:r>
-              <a:rPr lang="en-US" sz="1400" b="1" dirty="0"/>
-              <a:t>c</a:t>
-            </a:r>
-          </a:p>
-        </p:txBody>
-      </p:sp>
-      <p:sp>
-        <p:nvSpPr>
-          <p:cNvPr id="23" name="TextBox 22">
+              <a:rPr lang="en-US" sz="1200" b="1" dirty="0"/>
+              <a:t>d</a:t>
+            </a:r>
+          </a:p>
+        </p:txBody>
+      </p:sp>
+      <p:pic>
+        <p:nvPicPr>
+          <p:cNvPr id="41" name="Picture 40">
             <a:extLst>
               <a:ext uri="{FF2B5EF4-FFF2-40B4-BE49-F238E27FC236}">
-                <a16:creationId xmlns:a16="http://schemas.microsoft.com/office/drawing/2014/main" id="{EFEA0AB1-75DF-916E-7B06-8DBDB5180C19}"/>
-              </a:ext>
-            </a:extLst>
-          </p:cNvPr>
-          <p:cNvSpPr txBox="1"/>
-          <p:nvPr/>
-        </p:nvSpPr>
-        <p:spPr>
-          <a:xfrm>
-            <a:off x="-748" y="8986196"/>
-            <a:ext cx="518984" cy="307777"/>
-          </a:xfrm>
-          <a:prstGeom prst="rect">
-            <a:avLst/>
-          </a:prstGeom>
-          <a:noFill/>
-        </p:spPr>
-        <p:txBody>
-          <a:bodyPr wrap="square" rtlCol="0">
-            <a:spAutoFit/>
-          </a:bodyPr>
-          <a:lstStyle/>
-          <a:p>
-            <a:r>
-              <a:rPr lang="en-US" sz="1400" b="1" dirty="0"/>
-              <a:t>d</a:t>
-            </a:r>
-          </a:p>
-        </p:txBody>
-      </p:sp>
-      <p:sp>
-        <p:nvSpPr>
-          <p:cNvPr id="25" name="TextBox 24">
-            <a:extLst>
-              <a:ext uri="{FF2B5EF4-FFF2-40B4-BE49-F238E27FC236}">
-                <a16:creationId xmlns:a16="http://schemas.microsoft.com/office/drawing/2014/main" id="{F93D5BC8-BB5F-70C1-8C29-2A10B7DC9CED}"/>
-              </a:ext>
-            </a:extLst>
-          </p:cNvPr>
-          <p:cNvSpPr txBox="1"/>
-          <p:nvPr/>
-        </p:nvSpPr>
-        <p:spPr>
-          <a:xfrm>
-            <a:off x="5621320" y="8986195"/>
-            <a:ext cx="518984" cy="307777"/>
-          </a:xfrm>
-          <a:prstGeom prst="rect">
-            <a:avLst/>
-          </a:prstGeom>
-          <a:noFill/>
-        </p:spPr>
-        <p:txBody>
-          <a:bodyPr wrap="square" rtlCol="0">
-            <a:spAutoFit/>
-          </a:bodyPr>
-          <a:lstStyle/>
-          <a:p>
-            <a:r>
-              <a:rPr lang="en-US" sz="1400" b="1" dirty="0"/>
-              <a:t>e</a:t>
-            </a:r>
-          </a:p>
-        </p:txBody>
-      </p:sp>
-      <p:sp>
-        <p:nvSpPr>
-          <p:cNvPr id="26" name="TextBox 25">
-            <a:extLst>
-              <a:ext uri="{FF2B5EF4-FFF2-40B4-BE49-F238E27FC236}">
-                <a16:creationId xmlns:a16="http://schemas.microsoft.com/office/drawing/2014/main" id="{031B290A-3226-C4BE-07DA-121E4E845B89}"/>
-              </a:ext>
-            </a:extLst>
-          </p:cNvPr>
-          <p:cNvSpPr txBox="1"/>
-          <p:nvPr/>
-        </p:nvSpPr>
-        <p:spPr>
-          <a:xfrm>
-            <a:off x="-748" y="8509"/>
-            <a:ext cx="518984" cy="307777"/>
-          </a:xfrm>
-          <a:prstGeom prst="rect">
-            <a:avLst/>
-          </a:prstGeom>
-          <a:noFill/>
-        </p:spPr>
-        <p:txBody>
-          <a:bodyPr wrap="square" rtlCol="0">
-            <a:spAutoFit/>
-          </a:bodyPr>
-          <a:lstStyle/>
-          <a:p>
-            <a:r>
-              <a:rPr lang="en-US" sz="1400" b="1" dirty="0"/>
-              <a:t>a</a:t>
-            </a:r>
-          </a:p>
-        </p:txBody>
-      </p:sp>
-      <p:sp>
-        <p:nvSpPr>
-          <p:cNvPr id="27" name="TextBox 26">
-            <a:extLst>
-              <a:ext uri="{FF2B5EF4-FFF2-40B4-BE49-F238E27FC236}">
-                <a16:creationId xmlns:a16="http://schemas.microsoft.com/office/drawing/2014/main" id="{9DD83B9E-6C1D-8DFD-C8F0-40D6D38004B8}"/>
-              </a:ext>
-            </a:extLst>
-          </p:cNvPr>
-          <p:cNvSpPr txBox="1"/>
-          <p:nvPr/>
-        </p:nvSpPr>
-        <p:spPr>
-          <a:xfrm>
-            <a:off x="-748" y="2563175"/>
-            <a:ext cx="518984" cy="307777"/>
-          </a:xfrm>
-          <a:prstGeom prst="rect">
-            <a:avLst/>
-          </a:prstGeom>
-          <a:noFill/>
-        </p:spPr>
-        <p:txBody>
-          <a:bodyPr wrap="square" rtlCol="0">
-            <a:spAutoFit/>
-          </a:bodyPr>
-          <a:lstStyle/>
-          <a:p>
-            <a:r>
-              <a:rPr lang="en-US" sz="1400" b="1" dirty="0"/>
-              <a:t>b</a:t>
-            </a:r>
-          </a:p>
-        </p:txBody>
-      </p:sp>
-      <p:pic>
-        <p:nvPicPr>
-          <p:cNvPr id="28" name="Picture 27">
-            <a:extLst>
-              <a:ext uri="{FF2B5EF4-FFF2-40B4-BE49-F238E27FC236}">
-                <a16:creationId xmlns:a16="http://schemas.microsoft.com/office/drawing/2014/main" id="{A504CE4C-69FA-12B3-83A7-95C117593608}"/>
+                <a16:creationId xmlns:a16="http://schemas.microsoft.com/office/drawing/2014/main" id="{0838A446-927F-EEEB-0156-35F825DE31F5}"/>
               </a:ext>
             </a:extLst>
           </p:cNvPr>
@@ -3758,20 +3657,156 @@
         </p:nvPicPr>
         <p:blipFill>
           <a:blip r:embed="rId7"/>
+          <a:srcRect l="3535" t="4657" r="77756" b="72481"/>
           <a:stretch>
             <a:fillRect/>
           </a:stretch>
         </p:blipFill>
         <p:spPr>
           <a:xfrm>
-            <a:off x="5880812" y="162397"/>
-            <a:ext cx="3602032" cy="1705134"/>
+            <a:off x="4854781" y="233469"/>
+            <a:ext cx="2003219" cy="1703464"/>
           </a:xfrm>
           <a:prstGeom prst="rect">
             <a:avLst/>
           </a:prstGeom>
         </p:spPr>
       </p:pic>
+      <p:sp>
+        <p:nvSpPr>
+          <p:cNvPr id="46" name="TextBox 45">
+            <a:extLst>
+              <a:ext uri="{FF2B5EF4-FFF2-40B4-BE49-F238E27FC236}">
+                <a16:creationId xmlns:a16="http://schemas.microsoft.com/office/drawing/2014/main" id="{14D54F8B-2B0E-0731-AA74-B0EA0D8B944A}"/>
+              </a:ext>
+            </a:extLst>
+          </p:cNvPr>
+          <p:cNvSpPr txBox="1"/>
+          <p:nvPr/>
+        </p:nvSpPr>
+        <p:spPr>
+          <a:xfrm>
+            <a:off x="-748" y="6343418"/>
+            <a:ext cx="518984" cy="276999"/>
+          </a:xfrm>
+          <a:prstGeom prst="rect">
+            <a:avLst/>
+          </a:prstGeom>
+          <a:noFill/>
+        </p:spPr>
+        <p:txBody>
+          <a:bodyPr wrap="square" rtlCol="0">
+            <a:spAutoFit/>
+          </a:bodyPr>
+          <a:lstStyle/>
+          <a:p>
+            <a:r>
+              <a:rPr lang="en-US" sz="1200" b="1" dirty="0"/>
+              <a:t>e</a:t>
+            </a:r>
+          </a:p>
+        </p:txBody>
+      </p:sp>
+      <p:sp>
+        <p:nvSpPr>
+          <p:cNvPr id="51" name="TextBox 50">
+            <a:extLst>
+              <a:ext uri="{FF2B5EF4-FFF2-40B4-BE49-F238E27FC236}">
+                <a16:creationId xmlns:a16="http://schemas.microsoft.com/office/drawing/2014/main" id="{B7F8E6FB-1EFE-5F9F-48FA-EF52F6C7BF63}"/>
+              </a:ext>
+            </a:extLst>
+          </p:cNvPr>
+          <p:cNvSpPr txBox="1"/>
+          <p:nvPr/>
+        </p:nvSpPr>
+        <p:spPr>
+          <a:xfrm>
+            <a:off x="4622185" y="8508"/>
+            <a:ext cx="518984" cy="276999"/>
+          </a:xfrm>
+          <a:prstGeom prst="rect">
+            <a:avLst/>
+          </a:prstGeom>
+          <a:noFill/>
+        </p:spPr>
+        <p:txBody>
+          <a:bodyPr wrap="square" rtlCol="0">
+            <a:spAutoFit/>
+          </a:bodyPr>
+          <a:lstStyle/>
+          <a:p>
+            <a:r>
+              <a:rPr lang="en-US" sz="1200" b="1" dirty="0"/>
+              <a:t>b</a:t>
+            </a:r>
+          </a:p>
+        </p:txBody>
+      </p:sp>
+      <p:pic>
+        <p:nvPicPr>
+          <p:cNvPr id="59" name="Picture 58">
+            <a:extLst>
+              <a:ext uri="{FF2B5EF4-FFF2-40B4-BE49-F238E27FC236}">
+                <a16:creationId xmlns:a16="http://schemas.microsoft.com/office/drawing/2014/main" id="{051D0BE6-1C6D-66EE-0FA9-EA152676723C}"/>
+              </a:ext>
+            </a:extLst>
+          </p:cNvPr>
+          <p:cNvPicPr>
+            <a:picLocks noChangeAspect="1"/>
+          </p:cNvPicPr>
+          <p:nvPr/>
+        </p:nvPicPr>
+        <p:blipFill>
+          <a:blip r:embed="rId8"/>
+          <a:stretch>
+            <a:fillRect/>
+          </a:stretch>
+        </p:blipFill>
+        <p:spPr>
+          <a:xfrm>
+            <a:off x="3799388" y="6387160"/>
+            <a:ext cx="2391550" cy="2442797"/>
+          </a:xfrm>
+          <a:prstGeom prst="rect">
+            <a:avLst/>
+          </a:prstGeom>
+        </p:spPr>
+      </p:pic>
+      <p:sp>
+        <p:nvSpPr>
+          <p:cNvPr id="60" name="TextBox 59">
+            <a:extLst>
+              <a:ext uri="{FF2B5EF4-FFF2-40B4-BE49-F238E27FC236}">
+                <a16:creationId xmlns:a16="http://schemas.microsoft.com/office/drawing/2014/main" id="{2291AB61-BA14-B6F2-C28C-5547D4D44F3B}"/>
+              </a:ext>
+            </a:extLst>
+          </p:cNvPr>
+          <p:cNvSpPr txBox="1"/>
+          <p:nvPr/>
+        </p:nvSpPr>
+        <p:spPr>
+          <a:xfrm>
+            <a:off x="3429000" y="6343418"/>
+            <a:ext cx="518984" cy="276999"/>
+          </a:xfrm>
+          <a:prstGeom prst="rect">
+            <a:avLst/>
+          </a:prstGeom>
+          <a:noFill/>
+        </p:spPr>
+        <p:txBody>
+          <a:bodyPr wrap="square" rtlCol="0">
+            <a:spAutoFit/>
+          </a:bodyPr>
+          <a:lstStyle/>
+          <a:p>
+            <a:r>
+              <a:rPr lang="en-US" sz="1200" b="1" dirty="0"/>
+              <a:t>f</a:t>
+            </a:r>
+          </a:p>
+        </p:txBody>
+      </p:sp>
     </p:spTree>
     <p:extLst>
       <p:ext uri="{BB962C8B-B14F-4D97-AF65-F5344CB8AC3E}">

--- a/figures/Figure1_overview.pptx
+++ b/figures/Figure1_overview.pptx
@@ -5,10 +5,11 @@
     <p:sldMasterId id="2147483792" r:id="rId1"/>
   </p:sldMasterIdLst>
   <p:notesMasterIdLst>
-    <p:notesMasterId r:id="rId3"/>
+    <p:notesMasterId r:id="rId4"/>
   </p:notesMasterIdLst>
   <p:sldIdLst>
     <p:sldId id="256" r:id="rId2"/>
+    <p:sldId id="257" r:id="rId3"/>
   </p:sldIdLst>
   <p:sldSz cx="6858000" cy="9144000" type="letter"/>
   <p:notesSz cx="6858000" cy="9144000"/>
@@ -3811,6 +3812,151 @@
     <p:extLst>
       <p:ext uri="{BB962C8B-B14F-4D97-AF65-F5344CB8AC3E}">
         <p14:creationId xmlns:p14="http://schemas.microsoft.com/office/powerpoint/2010/main" val="4059027455"/>
+      </p:ext>
+    </p:extLst>
+  </p:cSld>
+  <p:clrMapOvr>
+    <a:masterClrMapping/>
+  </p:clrMapOvr>
+</p:sld>
+</file>
+
+<file path=ppt/slides/slide2.xml><?xml version="1.0" encoding="utf-8"?>
+<p:sld xmlns:a="http://schemas.openxmlformats.org/drawingml/2006/main" xmlns:r="http://schemas.openxmlformats.org/officeDocument/2006/relationships" xmlns:p="http://schemas.openxmlformats.org/presentationml/2006/main">
+  <p:cSld>
+    <p:spTree>
+      <p:nvGrpSpPr>
+        <p:cNvPr id="1" name=""/>
+        <p:cNvGrpSpPr/>
+        <p:nvPr/>
+      </p:nvGrpSpPr>
+      <p:grpSpPr>
+        <a:xfrm>
+          <a:off x="0" y="0"/>
+          <a:ext cx="0" cy="0"/>
+          <a:chOff x="0" y="0"/>
+          <a:chExt cx="0" cy="0"/>
+        </a:xfrm>
+      </p:grpSpPr>
+      <p:sp>
+        <p:nvSpPr>
+          <p:cNvPr id="4" name="TextBox 3">
+            <a:extLst>
+              <a:ext uri="{FF2B5EF4-FFF2-40B4-BE49-F238E27FC236}">
+                <a16:creationId xmlns:a16="http://schemas.microsoft.com/office/drawing/2014/main" id="{3098B2B6-13D6-748A-BE48-05CDB075C733}"/>
+              </a:ext>
+            </a:extLst>
+          </p:cNvPr>
+          <p:cNvSpPr txBox="1"/>
+          <p:nvPr/>
+        </p:nvSpPr>
+        <p:spPr>
+          <a:xfrm>
+            <a:off x="0" y="0"/>
+            <a:ext cx="6858000" cy="3970318"/>
+          </a:xfrm>
+          <a:prstGeom prst="rect">
+            <a:avLst/>
+          </a:prstGeom>
+          <a:noFill/>
+        </p:spPr>
+        <p:txBody>
+          <a:bodyPr wrap="square" rtlCol="0">
+            <a:spAutoFit/>
+          </a:bodyPr>
+          <a:lstStyle/>
+          <a:p>
+            <a:r>
+              <a:rPr lang="en-CA" sz="1050" b="1" dirty="0"/>
+              <a:t>Figure 1</a:t>
+            </a:r>
+            <a:r>
+              <a:rPr lang="en-CA" sz="1050" dirty="0"/>
+              <a:t>. Overview of </a:t>
+            </a:r>
+            <a:r>
+              <a:rPr lang="en-CA" sz="1050" dirty="0" err="1"/>
+              <a:t>XevaDB</a:t>
+            </a:r>
+            <a:r>
+              <a:rPr lang="en-CA" sz="1050" dirty="0"/>
+              <a:t>, a standardized longitudinal PDX pharmacogenomic resource.</a:t>
+            </a:r>
+          </a:p>
+          <a:p>
+            <a:r>
+              <a:rPr lang="en-CA" sz="1050" dirty="0"/>
+              <a:t>(a) Comparison of </a:t>
+            </a:r>
+            <a:r>
+              <a:rPr lang="en-CA" sz="1050" dirty="0" err="1"/>
+              <a:t>XevaDB</a:t>
+            </a:r>
+            <a:r>
+              <a:rPr lang="en-CA" sz="1050" dirty="0"/>
+              <a:t> with four existing PDX-related resources — PDX Finder/PDCM Finder (retired), </a:t>
+            </a:r>
+            <a:r>
+              <a:rPr lang="en-CA" sz="1050" dirty="0" err="1"/>
+              <a:t>EurOPDX</a:t>
+            </a:r>
+            <a:r>
+              <a:rPr lang="en-CA" sz="1050" dirty="0"/>
+              <a:t>, PDMR, and </a:t>
+            </a:r>
+            <a:r>
+              <a:rPr lang="en-CA" sz="1050" dirty="0" err="1"/>
+              <a:t>PDXNet</a:t>
+            </a:r>
+            <a:r>
+              <a:rPr lang="en-CA" sz="1050" dirty="0"/>
+              <a:t> — across five data-availability capabilities: model metadata, molecular profiles, drug response, longitudinal tumour volume, and analysis-ready dataset. Solid dots indicate full availability, semi-transparent dots indicate limited/partial availability, and the absence of a dot indicates the capability is not available. The organization or consortium responsible for each resource is shown below its name (EMBL-EBI, European Molecular Biology Laboratory–European Bioinformatics Institute; JAX, The Jackson Laboratory; NCI, National Cancer Institute; PMCC, Princess Margaret Cancer Centre). (b) </a:t>
+            </a:r>
+            <a:r>
+              <a:rPr lang="en-CA" sz="1050" dirty="0" err="1"/>
+              <a:t>XevaDB's</a:t>
+            </a:r>
+            <a:r>
+              <a:rPr lang="en-CA" sz="1050" dirty="0"/>
+              <a:t> internal data architecture. The </a:t>
+            </a:r>
+            <a:r>
+              <a:rPr lang="en-CA" sz="1050" dirty="0" err="1"/>
+              <a:t>XevaSet</a:t>
+            </a:r>
+            <a:r>
+              <a:rPr lang="en-CA" sz="1050" dirty="0"/>
+              <a:t> integrated object unifies model metadata, dataset information, omics profiles, drug annotation, omics-response mapping, longitudinal response, replicate design, and response metrics within a single standardized structure. (c) Data curation and analysis pipeline. Raw longitudinal response, omics, and clinical metadata from four source cohorts (McGill Breast, UHN Breast, UHN Lung, PDXE pan-cancer) are curated into standardized </a:t>
+            </a:r>
+            <a:r>
+              <a:rPr lang="en-CA" sz="1050" dirty="0" err="1"/>
+              <a:t>XevaSets</a:t>
+            </a:r>
+            <a:r>
+              <a:rPr lang="en-CA" sz="1050" dirty="0"/>
+              <a:t> and integrated into </a:t>
+            </a:r>
+            <a:r>
+              <a:rPr lang="en-CA" sz="1050" dirty="0" err="1"/>
+              <a:t>XevaDB</a:t>
+            </a:r>
+            <a:r>
+              <a:rPr lang="en-CA" sz="1050" dirty="0"/>
+              <a:t>, which supports four downstream case studies: (1) growth-kinetics modeling from control-arm curves and RNA-seq, (2) image-based drug-response classification from standardized tumour-volume curves, (3) cell-line-to-PDX transfer learning using response metrics and mutation/CNV data, and (4) multi-omics prediction of paclitaxel response. (d) Summary counts across the four cohorts for patients (n=469), PDX models (n=715; parental and resistant models shown separately), matched omics profiles (RNA-seq/mutation/CNV; n=344/339/339), drugs (n=72), and treatment-control experiments (n=5,632). (e) Distribution of PDX models by cancer type (n=715 total across six tumour types), with each wedge group further broken down by contributing dataset (shown in the legend); slice groups are radially separated to indicate cancer type. (f) Drugs shared across more than one dataset (10 of 72 total drugs), shown as a dot-matrix across the four cohorts; connected dots indicate the same drug tested in multiple datasets.</a:t>
+            </a:r>
+          </a:p>
+          <a:p>
+            <a:br>
+              <a:rPr lang="en-CA" sz="1050" dirty="0"/>
+            </a:br>
+            <a:endParaRPr lang="en-US" sz="1050" dirty="0"/>
+          </a:p>
+        </p:txBody>
+      </p:sp>
+    </p:spTree>
+    <p:extLst>
+      <p:ext uri="{BB962C8B-B14F-4D97-AF65-F5344CB8AC3E}">
+        <p14:creationId xmlns:p14="http://schemas.microsoft.com/office/powerpoint/2010/main" val="3209200321"/>
       </p:ext>
     </p:extLst>
   </p:cSld>
